--- a/docs/defense/毕业答辩_OSrCIR三路融合.pptx
+++ b/docs/defense/毕业答辩_OSrCIR三路融合.pptx
@@ -21,6 +21,7 @@
     <p:sldId id="269" r:id="rId20"/>
     <p:sldId id="270" r:id="rId21"/>
     <p:sldId id="271" r:id="rId22"/>
+    <p:sldId id="273" r:id="rId24"/>
     <p:sldId id="272" r:id="rId23"/>
   </p:sldIdLst>
   <p:sldSz cx="12191695" cy="6858000" type="screen4x3"/>
@@ -121,6 +122,1716 @@
     </a:lvl9pPr>
   </p:defaultTextStyle>
 </p:presentation>
+</file>
+
+<file path=ppt/notesMasters/notesMaster1.xml><?xml version="1.0" encoding="utf-8"?>
+<p:notesMaster xmlns:a="http://schemas.openxmlformats.org/drawingml/2006/main" xmlns:p="http://schemas.openxmlformats.org/presentationml/2006/main" xmlns:r="http://schemas.openxmlformats.org/officeDocument/2006/relationships">
+  <p:cSld>
+    <p:bg>
+      <p:bgRef idx="1001">
+        <a:schemeClr val="bg1"/>
+      </p:bgRef>
+    </p:bg>
+    <p:spTree>
+      <p:nvGrpSpPr>
+        <p:cNvPr id="1" name=""/>
+        <p:cNvGrpSpPr/>
+        <p:nvPr/>
+      </p:nvGrpSpPr>
+      <p:grpSpPr>
+        <a:xfrm>
+          <a:off x="0" y="0"/>
+          <a:ext cx="0" cy="0"/>
+          <a:chOff x="0" y="0"/>
+          <a:chExt cx="0" cy="0"/>
+        </a:xfrm>
+      </p:grpSpPr>
+      <p:sp>
+        <p:nvSpPr>
+          <p:cNvPr id="2" name="Header Placeholder 1"/>
+          <p:cNvSpPr>
+            <a:spLocks noGrp="1"/>
+          </p:cNvSpPr>
+          <p:nvPr>
+            <p:ph type="hdr" sz="quarter"/>
+          </p:nvPr>
+        </p:nvSpPr>
+        <p:spPr>
+          <a:xfrm>
+            <a:off x="0" y="0"/>
+            <a:ext cx="2971800" cy="457200"/>
+          </a:xfrm>
+          <a:prstGeom prst="rect">
+            <a:avLst/>
+          </a:prstGeom>
+        </p:spPr>
+        <p:txBody>
+          <a:bodyPr vert="horz" lIns="91440" tIns="45720" rIns="91440" bIns="45720" rtlCol="0"/>
+          <a:lstStyle>
+            <a:lvl1pPr algn="l">
+              <a:defRPr sz="1200"/>
+            </a:lvl1pPr>
+          </a:lstStyle>
+          <a:p>
+            <a:endParaRPr lang="en-US"/>
+          </a:p>
+        </p:txBody>
+      </p:sp>
+      <p:sp>
+        <p:nvSpPr>
+          <p:cNvPr id="3" name="Date Placeholder 2"/>
+          <p:cNvSpPr>
+            <a:spLocks noGrp="1"/>
+          </p:cNvSpPr>
+          <p:nvPr>
+            <p:ph type="dt" idx="1"/>
+          </p:nvPr>
+        </p:nvSpPr>
+        <p:spPr>
+          <a:xfrm>
+            <a:off x="3884613" y="0"/>
+            <a:ext cx="2971800" cy="457200"/>
+          </a:xfrm>
+          <a:prstGeom prst="rect">
+            <a:avLst/>
+          </a:prstGeom>
+        </p:spPr>
+        <p:txBody>
+          <a:bodyPr vert="horz" lIns="91440" tIns="45720" rIns="91440" bIns="45720" rtlCol="0"/>
+          <a:lstStyle>
+            <a:lvl1pPr algn="r">
+              <a:defRPr sz="1200"/>
+            </a:lvl1pPr>
+          </a:lstStyle>
+          <a:p>
+            <a:fld id="{0F89C1C7-3DCD-1040-A9CF-14679D8B5DDD}" type="datetimeFigureOut">
+              <a:rPr lang="en-US" smtClean="0"/>
+              <a:t>10/17/16</a:t>
+            </a:fld>
+            <a:endParaRPr lang="en-US"/>
+          </a:p>
+        </p:txBody>
+      </p:sp>
+      <p:sp>
+        <p:nvSpPr>
+          <p:cNvPr id="4" name="Slide Image Placeholder 3"/>
+          <p:cNvSpPr>
+            <a:spLocks noGrp="1" noRot="1" noChangeAspect="1"/>
+          </p:cNvSpPr>
+          <p:nvPr>
+            <p:ph type="sldImg" idx="2"/>
+          </p:nvPr>
+        </p:nvSpPr>
+        <p:spPr>
+          <a:xfrm>
+            <a:off x="1143000" y="685800"/>
+            <a:ext cx="4572000" cy="3429000"/>
+          </a:xfrm>
+          <a:prstGeom prst="rect">
+            <a:avLst/>
+          </a:prstGeom>
+          <a:noFill/>
+          <a:ln w="12700">
+            <a:solidFill>
+              <a:prstClr val="black"/>
+            </a:solidFill>
+          </a:ln>
+        </p:spPr>
+        <p:txBody>
+          <a:bodyPr vert="horz" lIns="91440" tIns="45720" rIns="91440" bIns="45720" rtlCol="0" anchor="ctr"/>
+          <a:lstStyle/>
+          <a:p>
+            <a:endParaRPr lang="en-US"/>
+          </a:p>
+        </p:txBody>
+      </p:sp>
+      <p:sp>
+        <p:nvSpPr>
+          <p:cNvPr id="5" name="Notes Placeholder 4"/>
+          <p:cNvSpPr>
+            <a:spLocks noGrp="1"/>
+          </p:cNvSpPr>
+          <p:nvPr>
+            <p:ph type="body" sz="quarter" idx="3"/>
+          </p:nvPr>
+        </p:nvSpPr>
+        <p:spPr>
+          <a:xfrm>
+            <a:off x="685800" y="4343400"/>
+            <a:ext cx="5486400" cy="4114800"/>
+          </a:xfrm>
+          <a:prstGeom prst="rect">
+            <a:avLst/>
+          </a:prstGeom>
+        </p:spPr>
+        <p:txBody>
+          <a:bodyPr vert="horz" lIns="91440" tIns="45720" rIns="91440" bIns="45720" rtlCol="0"/>
+          <a:lstStyle/>
+          <a:p>
+            <a:pPr lvl="0"/>
+            <a:r>
+              <a:rPr lang="en-US" smtClean="0"/>
+              <a:t>Click to edit Master text styles</a:t>
+            </a:r>
+          </a:p>
+          <a:p>
+            <a:pPr lvl="1"/>
+            <a:r>
+              <a:rPr lang="en-US" smtClean="0"/>
+              <a:t>Second level</a:t>
+            </a:r>
+          </a:p>
+          <a:p>
+            <a:pPr lvl="2"/>
+            <a:r>
+              <a:rPr lang="en-US" smtClean="0"/>
+              <a:t>Third level</a:t>
+            </a:r>
+          </a:p>
+          <a:p>
+            <a:pPr lvl="3"/>
+            <a:r>
+              <a:rPr lang="en-US" smtClean="0"/>
+              <a:t>Fourth level</a:t>
+            </a:r>
+          </a:p>
+          <a:p>
+            <a:pPr lvl="4"/>
+            <a:r>
+              <a:rPr lang="en-US" smtClean="0"/>
+              <a:t>Fifth level</a:t>
+            </a:r>
+            <a:endParaRPr lang="en-US"/>
+          </a:p>
+        </p:txBody>
+      </p:sp>
+      <p:sp>
+        <p:nvSpPr>
+          <p:cNvPr id="6" name="Footer Placeholder 5"/>
+          <p:cNvSpPr>
+            <a:spLocks noGrp="1"/>
+          </p:cNvSpPr>
+          <p:nvPr>
+            <p:ph type="ftr" sz="quarter" idx="4"/>
+          </p:nvPr>
+        </p:nvSpPr>
+        <p:spPr>
+          <a:xfrm>
+            <a:off x="0" y="8685213"/>
+            <a:ext cx="2971800" cy="457200"/>
+          </a:xfrm>
+          <a:prstGeom prst="rect">
+            <a:avLst/>
+          </a:prstGeom>
+        </p:spPr>
+        <p:txBody>
+          <a:bodyPr vert="horz" lIns="91440" tIns="45720" rIns="91440" bIns="45720" rtlCol="0" anchor="b"/>
+          <a:lstStyle>
+            <a:lvl1pPr algn="l">
+              <a:defRPr sz="1200"/>
+            </a:lvl1pPr>
+          </a:lstStyle>
+          <a:p>
+            <a:endParaRPr lang="en-US"/>
+          </a:p>
+        </p:txBody>
+      </p:sp>
+      <p:sp>
+        <p:nvSpPr>
+          <p:cNvPr id="7" name="Slide Number Placeholder 6"/>
+          <p:cNvSpPr>
+            <a:spLocks noGrp="1"/>
+          </p:cNvSpPr>
+          <p:nvPr>
+            <p:ph type="sldNum" sz="quarter" idx="5"/>
+          </p:nvPr>
+        </p:nvSpPr>
+        <p:spPr>
+          <a:xfrm>
+            <a:off x="3884613" y="8685213"/>
+            <a:ext cx="2971800" cy="457200"/>
+          </a:xfrm>
+          <a:prstGeom prst="rect">
+            <a:avLst/>
+          </a:prstGeom>
+        </p:spPr>
+        <p:txBody>
+          <a:bodyPr vert="horz" lIns="91440" tIns="45720" rIns="91440" bIns="45720" rtlCol="0" anchor="b"/>
+          <a:lstStyle>
+            <a:lvl1pPr algn="r">
+              <a:defRPr sz="1200"/>
+            </a:lvl1pPr>
+          </a:lstStyle>
+          <a:p>
+            <a:fld id="{BB5E49A5-4136-284D-997B-48E1D791AD67}" type="slidenum">
+              <a:rPr lang="en-US" smtClean="0"/>
+              <a:t>‹#›</a:t>
+            </a:fld>
+            <a:endParaRPr lang="en-US"/>
+          </a:p>
+        </p:txBody>
+      </p:sp>
+    </p:spTree>
+    <p:extLst>
+      <p:ext uri="{BB962C8B-B14F-4D97-AF65-F5344CB8AC3E}">
+        <p14:creationId xmlns:p14="http://schemas.microsoft.com/office/powerpoint/2010/main" val="2623252185"/>
+      </p:ext>
+    </p:extLst>
+  </p:cSld>
+  <p:clrMap bg1="lt1" tx1="dk1" bg2="lt2" tx2="dk2" accent1="accent1" accent2="accent2" accent3="accent3" accent4="accent4" accent5="accent5" accent6="accent6" hlink="hlink" folHlink="folHlink"/>
+  <p:notesStyle>
+    <a:lvl1pPr marL="0" algn="l" defTabSz="457200" rtl="0" eaLnBrk="1" latinLnBrk="0" hangingPunct="1">
+      <a:defRPr sz="1200" kern="1200">
+        <a:solidFill>
+          <a:schemeClr val="tx1"/>
+        </a:solidFill>
+        <a:latin typeface="+mn-lt"/>
+        <a:ea typeface="+mn-ea"/>
+        <a:cs typeface="+mn-cs"/>
+      </a:defRPr>
+    </a:lvl1pPr>
+    <a:lvl2pPr marL="457200" algn="l" defTabSz="457200" rtl="0" eaLnBrk="1" latinLnBrk="0" hangingPunct="1">
+      <a:defRPr sz="1200" kern="1200">
+        <a:solidFill>
+          <a:schemeClr val="tx1"/>
+        </a:solidFill>
+        <a:latin typeface="+mn-lt"/>
+        <a:ea typeface="+mn-ea"/>
+        <a:cs typeface="+mn-cs"/>
+      </a:defRPr>
+    </a:lvl2pPr>
+    <a:lvl3pPr marL="914400" algn="l" defTabSz="457200" rtl="0" eaLnBrk="1" latinLnBrk="0" hangingPunct="1">
+      <a:defRPr sz="1200" kern="1200">
+        <a:solidFill>
+          <a:schemeClr val="tx1"/>
+        </a:solidFill>
+        <a:latin typeface="+mn-lt"/>
+        <a:ea typeface="+mn-ea"/>
+        <a:cs typeface="+mn-cs"/>
+      </a:defRPr>
+    </a:lvl3pPr>
+    <a:lvl4pPr marL="1371600" algn="l" defTabSz="457200" rtl="0" eaLnBrk="1" latinLnBrk="0" hangingPunct="1">
+      <a:defRPr sz="1200" kern="1200">
+        <a:solidFill>
+          <a:schemeClr val="tx1"/>
+        </a:solidFill>
+        <a:latin typeface="+mn-lt"/>
+        <a:ea typeface="+mn-ea"/>
+        <a:cs typeface="+mn-cs"/>
+      </a:defRPr>
+    </a:lvl4pPr>
+    <a:lvl5pPr marL="1828800" algn="l" defTabSz="457200" rtl="0" eaLnBrk="1" latinLnBrk="0" hangingPunct="1">
+      <a:defRPr sz="1200" kern="1200">
+        <a:solidFill>
+          <a:schemeClr val="tx1"/>
+        </a:solidFill>
+        <a:latin typeface="+mn-lt"/>
+        <a:ea typeface="+mn-ea"/>
+        <a:cs typeface="+mn-cs"/>
+      </a:defRPr>
+    </a:lvl5pPr>
+    <a:lvl6pPr marL="2286000" algn="l" defTabSz="457200" rtl="0" eaLnBrk="1" latinLnBrk="0" hangingPunct="1">
+      <a:defRPr sz="1200" kern="1200">
+        <a:solidFill>
+          <a:schemeClr val="tx1"/>
+        </a:solidFill>
+        <a:latin typeface="+mn-lt"/>
+        <a:ea typeface="+mn-ea"/>
+        <a:cs typeface="+mn-cs"/>
+      </a:defRPr>
+    </a:lvl6pPr>
+    <a:lvl7pPr marL="2743200" algn="l" defTabSz="457200" rtl="0" eaLnBrk="1" latinLnBrk="0" hangingPunct="1">
+      <a:defRPr sz="1200" kern="1200">
+        <a:solidFill>
+          <a:schemeClr val="tx1"/>
+        </a:solidFill>
+        <a:latin typeface="+mn-lt"/>
+        <a:ea typeface="+mn-ea"/>
+        <a:cs typeface="+mn-cs"/>
+      </a:defRPr>
+    </a:lvl7pPr>
+    <a:lvl8pPr marL="3200400" algn="l" defTabSz="457200" rtl="0" eaLnBrk="1" latinLnBrk="0" hangingPunct="1">
+      <a:defRPr sz="1200" kern="1200">
+        <a:solidFill>
+          <a:schemeClr val="tx1"/>
+        </a:solidFill>
+        <a:latin typeface="+mn-lt"/>
+        <a:ea typeface="+mn-ea"/>
+        <a:cs typeface="+mn-cs"/>
+      </a:defRPr>
+    </a:lvl8pPr>
+    <a:lvl9pPr marL="3657600" algn="l" defTabSz="457200" rtl="0" eaLnBrk="1" latinLnBrk="0" hangingPunct="1">
+      <a:defRPr sz="1200" kern="1200">
+        <a:solidFill>
+          <a:schemeClr val="tx1"/>
+        </a:solidFill>
+        <a:latin typeface="+mn-lt"/>
+        <a:ea typeface="+mn-ea"/>
+        <a:cs typeface="+mn-cs"/>
+      </a:defRPr>
+    </a:lvl9pPr>
+  </p:notesStyle>
+</p:notesMaster>
+</file>
+
+<file path=ppt/notesSlides/notesSlide1.xml><?xml version="1.0" encoding="utf-8"?>
+<p:notes xmlns:a="http://schemas.openxmlformats.org/drawingml/2006/main" xmlns:p="http://schemas.openxmlformats.org/presentationml/2006/main" xmlns:r="http://schemas.openxmlformats.org/officeDocument/2006/relationships">
+  <p:cSld>
+    <p:spTree>
+      <p:nvGrpSpPr>
+        <p:cNvPr id="1" name=""/>
+        <p:cNvGrpSpPr/>
+        <p:nvPr/>
+      </p:nvGrpSpPr>
+      <p:grpSpPr>
+        <a:xfrm>
+          <a:off x="0" y="0"/>
+          <a:ext cx="0" cy="0"/>
+          <a:chOff x="0" y="0"/>
+          <a:chExt cx="0" cy="0"/>
+        </a:xfrm>
+      </p:grpSpPr>
+      <p:sp>
+        <p:nvSpPr>
+          <p:cNvPr id="2" name="Slide Image Placeholder 1"/>
+          <p:cNvSpPr>
+            <a:spLocks noGrp="1"/>
+          </p:cNvSpPr>
+          <p:nvPr>
+            <p:ph type="sldImg" idx="2"/>
+          </p:nvPr>
+        </p:nvSpPr>
+        <p:spPr/>
+      </p:sp>
+      <p:sp>
+        <p:nvSpPr>
+          <p:cNvPr id="3" name="Notes Placeholder 2"/>
+          <p:cNvSpPr>
+            <a:spLocks noGrp="1"/>
+          </p:cNvSpPr>
+          <p:nvPr>
+            <p:ph type="body" idx="3" sz="quarter"/>
+          </p:nvPr>
+        </p:nvSpPr>
+        <p:spPr/>
+        <p:txBody>
+          <a:bodyPr/>
+          <a:lstStyle/>
+          <a:p>
+            <a:r>
+              <a:rPr sz="1100">
+                <a:latin typeface="Microsoft YaHei"/>
+              </a:rPr>
+              <a:t>[开场 30 秒]
+各位老师好，我是同济大学 2026 届本科毕业生杨浩铭，我的毕业设计题目是《基于视觉代理与描述融合的零样本组合式图像检索改进》，指导老师是 X 老师。本课题复现并改进了 CVPR 2025 Highlight 论文 OSrCIR。下面我将用大约 12 分钟向各位老师汇报。</a:t>
+            </a:r>
+          </a:p>
+        </p:txBody>
+      </p:sp>
+      <p:sp>
+        <p:nvSpPr>
+          <p:cNvPr id="4" name="Slide Number Placeholder 3"/>
+          <p:cNvSpPr>
+            <a:spLocks noGrp="1"/>
+          </p:cNvSpPr>
+          <p:nvPr>
+            <p:ph type="sldNum" idx="5" sz="quarter"/>
+          </p:nvPr>
+        </p:nvSpPr>
+        <p:spPr/>
+      </p:sp>
+    </p:spTree>
+  </p:cSld>
+  <p:clrMapOvr>
+    <a:masterClrMapping/>
+  </p:clrMapOvr>
+</p:notes>
+</file>
+
+<file path=ppt/notesSlides/notesSlide10.xml><?xml version="1.0" encoding="utf-8"?>
+<p:notes xmlns:a="http://schemas.openxmlformats.org/drawingml/2006/main" xmlns:p="http://schemas.openxmlformats.org/presentationml/2006/main" xmlns:r="http://schemas.openxmlformats.org/officeDocument/2006/relationships">
+  <p:cSld>
+    <p:spTree>
+      <p:nvGrpSpPr>
+        <p:cNvPr id="1" name=""/>
+        <p:cNvGrpSpPr/>
+        <p:nvPr/>
+      </p:nvGrpSpPr>
+      <p:grpSpPr>
+        <a:xfrm>
+          <a:off x="0" y="0"/>
+          <a:ext cx="0" cy="0"/>
+          <a:chOff x="0" y="0"/>
+          <a:chExt cx="0" cy="0"/>
+        </a:xfrm>
+      </p:grpSpPr>
+      <p:sp>
+        <p:nvSpPr>
+          <p:cNvPr id="2" name="Slide Image Placeholder 1"/>
+          <p:cNvSpPr>
+            <a:spLocks noGrp="1"/>
+          </p:cNvSpPr>
+          <p:nvPr>
+            <p:ph type="sldImg" idx="2"/>
+          </p:nvPr>
+        </p:nvSpPr>
+        <p:spPr/>
+      </p:sp>
+      <p:sp>
+        <p:nvSpPr>
+          <p:cNvPr id="3" name="Notes Placeholder 2"/>
+          <p:cNvSpPr>
+            <a:spLocks noGrp="1"/>
+          </p:cNvSpPr>
+          <p:nvPr>
+            <p:ph type="body" idx="3" sz="quarter"/>
+          </p:nvPr>
+        </p:nvSpPr>
+        <p:spPr/>
+        <p:txBody>
+          <a:bodyPr/>
+          <a:lstStyle/>
+          <a:p>
+            <a:r>
+              <a:rPr sz="1100">
+                <a:latin typeface="Microsoft YaHei"/>
+              </a:rPr>
+              <a:t>[主结果 90 秒]
+这张图是 9 个数据集 baseline vs 三路融合对比。结论很清楚——35 个指标全部正向提升，没有一个持平、没有一个下降。
+重点几个：CIRCO mAP@10 从 16.21 到 21.26，相对 +31%；CIRR R@1 从 22.96 到 25.90，+13%；GeneCIS change_object R@1 从 13.83 到 25.51，相对 +85%，全场最大。
+特别说明：我没直接对比原论文 GPT-4o 数字，因为那是 MLLM 差异而非方法差异，baseline 已经用相同 Qwen 复现过。</a:t>
+            </a:r>
+          </a:p>
+        </p:txBody>
+      </p:sp>
+      <p:sp>
+        <p:nvSpPr>
+          <p:cNvPr id="4" name="Slide Number Placeholder 3"/>
+          <p:cNvSpPr>
+            <a:spLocks noGrp="1"/>
+          </p:cNvSpPr>
+          <p:nvPr>
+            <p:ph type="sldNum" idx="5" sz="quarter"/>
+          </p:nvPr>
+        </p:nvSpPr>
+        <p:spPr/>
+      </p:sp>
+    </p:spTree>
+  </p:cSld>
+  <p:clrMapOvr>
+    <a:masterClrMapping/>
+  </p:clrMapOvr>
+</p:notes>
+</file>
+
+<file path=ppt/notesSlides/notesSlide11.xml><?xml version="1.0" encoding="utf-8"?>
+<p:notes xmlns:a="http://schemas.openxmlformats.org/drawingml/2006/main" xmlns:p="http://schemas.openxmlformats.org/presentationml/2006/main" xmlns:r="http://schemas.openxmlformats.org/officeDocument/2006/relationships">
+  <p:cSld>
+    <p:spTree>
+      <p:nvGrpSpPr>
+        <p:cNvPr id="1" name=""/>
+        <p:cNvGrpSpPr/>
+        <p:nvPr/>
+      </p:nvGrpSpPr>
+      <p:grpSpPr>
+        <a:xfrm>
+          <a:off x="0" y="0"/>
+          <a:ext cx="0" cy="0"/>
+          <a:chOff x="0" y="0"/>
+          <a:chExt cx="0" cy="0"/>
+        </a:xfrm>
+      </p:grpSpPr>
+      <p:sp>
+        <p:nvSpPr>
+          <p:cNvPr id="2" name="Slide Image Placeholder 1"/>
+          <p:cNvSpPr>
+            <a:spLocks noGrp="1"/>
+          </p:cNvSpPr>
+          <p:nvPr>
+            <p:ph type="sldImg" idx="2"/>
+          </p:nvPr>
+        </p:nvSpPr>
+        <p:spPr/>
+      </p:sp>
+      <p:sp>
+        <p:nvSpPr>
+          <p:cNvPr id="3" name="Notes Placeholder 2"/>
+          <p:cNvSpPr>
+            <a:spLocks noGrp="1"/>
+          </p:cNvSpPr>
+          <p:nvPr>
+            <p:ph type="body" idx="3" sz="quarter"/>
+          </p:nvPr>
+        </p:nvSpPr>
+        <p:spPr/>
+        <p:txBody>
+          <a:bodyPr/>
+          <a:lstStyle/>
+          <a:p>
+            <a:r>
+              <a:rPr sz="1100">
+                <a:latin typeface="Microsoft YaHei"/>
+              </a:rPr>
+              <a:t>[FashionIQ 细化 45 秒]
+FashionIQ 分 dress/shirt/toptee 三个子集。dress R@10 +3.49 (+22%)、toptee +4.26 (+18%)；shirt 提升仅 +5% 但仍正向——这也解释了为什么需要 ensemble——V7 在 shirt 上会退化，ensemble 让它 不退化且仍然有提升 。</a:t>
+            </a:r>
+          </a:p>
+        </p:txBody>
+      </p:sp>
+      <p:sp>
+        <p:nvSpPr>
+          <p:cNvPr id="4" name="Slide Number Placeholder 3"/>
+          <p:cNvSpPr>
+            <a:spLocks noGrp="1"/>
+          </p:cNvSpPr>
+          <p:nvPr>
+            <p:ph type="sldNum" idx="5" sz="quarter"/>
+          </p:nvPr>
+        </p:nvSpPr>
+        <p:spPr/>
+      </p:sp>
+    </p:spTree>
+  </p:cSld>
+  <p:clrMapOvr>
+    <a:masterClrMapping/>
+  </p:clrMapOvr>
+</p:notes>
+</file>
+
+<file path=ppt/notesSlides/notesSlide12.xml><?xml version="1.0" encoding="utf-8"?>
+<p:notes xmlns:a="http://schemas.openxmlformats.org/drawingml/2006/main" xmlns:p="http://schemas.openxmlformats.org/presentationml/2006/main" xmlns:r="http://schemas.openxmlformats.org/officeDocument/2006/relationships">
+  <p:cSld>
+    <p:spTree>
+      <p:nvGrpSpPr>
+        <p:cNvPr id="1" name=""/>
+        <p:cNvGrpSpPr/>
+        <p:nvPr/>
+      </p:nvGrpSpPr>
+      <p:grpSpPr>
+        <a:xfrm>
+          <a:off x="0" y="0"/>
+          <a:ext cx="0" cy="0"/>
+          <a:chOff x="0" y="0"/>
+          <a:chExt cx="0" cy="0"/>
+        </a:xfrm>
+      </p:grpSpPr>
+      <p:sp>
+        <p:nvSpPr>
+          <p:cNvPr id="2" name="Slide Image Placeholder 1"/>
+          <p:cNvSpPr>
+            <a:spLocks noGrp="1"/>
+          </p:cNvSpPr>
+          <p:nvPr>
+            <p:ph type="sldImg" idx="2"/>
+          </p:nvPr>
+        </p:nvSpPr>
+        <p:spPr/>
+      </p:sp>
+      <p:sp>
+        <p:nvSpPr>
+          <p:cNvPr id="3" name="Notes Placeholder 2"/>
+          <p:cNvSpPr>
+            <a:spLocks noGrp="1"/>
+          </p:cNvSpPr>
+          <p:nvPr>
+            <p:ph type="body" idx="3" sz="quarter"/>
+          </p:nvPr>
+        </p:nvSpPr>
+        <p:spPr/>
+        <p:txBody>
+          <a:bodyPr/>
+          <a:lstStyle/>
+          <a:p>
+            <a:r>
+              <a:rPr sz="1100">
+                <a:latin typeface="Microsoft YaHei"/>
+              </a:rPr>
+              <a:t>[α/β 网格搜索 60 秒]
+这张热力图是 GeneCIS 子集 R@1 随 α/β 变化。观察：默认 α=0.9 β=0.7 在绝大多数子集 top-3；不同子集最优差异显著，change_object 偏好 α=0.95 β=0.50，focus_object 反而是 α=0.80 β=1.00——说明 task-adaptive 是一个有价值的研究方向。</a:t>
+            </a:r>
+          </a:p>
+        </p:txBody>
+      </p:sp>
+      <p:sp>
+        <p:nvSpPr>
+          <p:cNvPr id="4" name="Slide Number Placeholder 3"/>
+          <p:cNvSpPr>
+            <a:spLocks noGrp="1"/>
+          </p:cNvSpPr>
+          <p:nvPr>
+            <p:ph type="sldNum" idx="5" sz="quarter"/>
+          </p:nvPr>
+        </p:nvSpPr>
+        <p:spPr/>
+      </p:sp>
+    </p:spTree>
+  </p:cSld>
+  <p:clrMapOvr>
+    <a:masterClrMapping/>
+  </p:clrMapOvr>
+</p:notes>
+</file>
+
+<file path=ppt/notesSlides/notesSlide13.xml><?xml version="1.0" encoding="utf-8"?>
+<p:notes xmlns:a="http://schemas.openxmlformats.org/drawingml/2006/main" xmlns:p="http://schemas.openxmlformats.org/presentationml/2006/main" xmlns:r="http://schemas.openxmlformats.org/officeDocument/2006/relationships">
+  <p:cSld>
+    <p:spTree>
+      <p:nvGrpSpPr>
+        <p:cNvPr id="1" name=""/>
+        <p:cNvGrpSpPr/>
+        <p:nvPr/>
+      </p:nvGrpSpPr>
+      <p:grpSpPr>
+        <a:xfrm>
+          <a:off x="0" y="0"/>
+          <a:ext cx="0" cy="0"/>
+          <a:chOff x="0" y="0"/>
+          <a:chExt cx="0" cy="0"/>
+        </a:xfrm>
+      </p:grpSpPr>
+      <p:sp>
+        <p:nvSpPr>
+          <p:cNvPr id="2" name="Slide Image Placeholder 1"/>
+          <p:cNvSpPr>
+            <a:spLocks noGrp="1"/>
+          </p:cNvSpPr>
+          <p:nvPr>
+            <p:ph type="sldImg" idx="2"/>
+          </p:nvPr>
+        </p:nvSpPr>
+        <p:spPr/>
+      </p:sp>
+      <p:sp>
+        <p:nvSpPr>
+          <p:cNvPr id="3" name="Notes Placeholder 2"/>
+          <p:cNvSpPr>
+            <a:spLocks noGrp="1"/>
+          </p:cNvSpPr>
+          <p:nvPr>
+            <p:ph type="body" idx="3" sz="quarter"/>
+          </p:nvPr>
+        </p:nvSpPr>
+        <p:spPr/>
+        <p:txBody>
+          <a:bodyPr/>
+          <a:lstStyle/>
+          <a:p>
+            <a:r>
+              <a:rPr sz="1100">
+                <a:latin typeface="Microsoft YaHei"/>
+              </a:rPr>
+              <a:t>[组件消融 45 秒]
+这张条形图把三路融合拆成三个独立组件：只加 ensemble、只加 V7、只加 proxy。三个组件都有独立贡献，完整三路融合取得最大增益——证明三者互补而非冗余。proxy + ensemble 组合同时给了图像 anchor 和描述鲁棒性。</a:t>
+            </a:r>
+          </a:p>
+        </p:txBody>
+      </p:sp>
+      <p:sp>
+        <p:nvSpPr>
+          <p:cNvPr id="4" name="Slide Number Placeholder 3"/>
+          <p:cNvSpPr>
+            <a:spLocks noGrp="1"/>
+          </p:cNvSpPr>
+          <p:nvPr>
+            <p:ph type="sldNum" idx="5" sz="quarter"/>
+          </p:nvPr>
+        </p:nvSpPr>
+        <p:spPr/>
+      </p:sp>
+    </p:spTree>
+  </p:cSld>
+  <p:clrMapOvr>
+    <a:masterClrMapping/>
+  </p:clrMapOvr>
+</p:notes>
+</file>
+
+<file path=ppt/notesSlides/notesSlide14.xml><?xml version="1.0" encoding="utf-8"?>
+<p:notes xmlns:a="http://schemas.openxmlformats.org/drawingml/2006/main" xmlns:p="http://schemas.openxmlformats.org/presentationml/2006/main" xmlns:r="http://schemas.openxmlformats.org/officeDocument/2006/relationships">
+  <p:cSld>
+    <p:spTree>
+      <p:nvGrpSpPr>
+        <p:cNvPr id="1" name=""/>
+        <p:cNvGrpSpPr/>
+        <p:nvPr/>
+      </p:nvGrpSpPr>
+      <p:grpSpPr>
+        <a:xfrm>
+          <a:off x="0" y="0"/>
+          <a:ext cx="0" cy="0"/>
+          <a:chOff x="0" y="0"/>
+          <a:chExt cx="0" cy="0"/>
+        </a:xfrm>
+      </p:grpSpPr>
+      <p:sp>
+        <p:nvSpPr>
+          <p:cNvPr id="2" name="Slide Image Placeholder 1"/>
+          <p:cNvSpPr>
+            <a:spLocks noGrp="1"/>
+          </p:cNvSpPr>
+          <p:nvPr>
+            <p:ph type="sldImg" idx="2"/>
+          </p:nvPr>
+        </p:nvSpPr>
+        <p:spPr/>
+      </p:sp>
+      <p:sp>
+        <p:nvSpPr>
+          <p:cNvPr id="3" name="Notes Placeholder 2"/>
+          <p:cNvSpPr>
+            <a:spLocks noGrp="1"/>
+          </p:cNvSpPr>
+          <p:nvPr>
+            <p:ph type="body" idx="3" sz="quarter"/>
+          </p:nvPr>
+        </p:nvSpPr>
+        <p:spPr/>
+        <p:txBody>
+          <a:bodyPr/>
+          <a:lstStyle/>
+          <a:p>
+            <a:r>
+              <a:rPr sz="1100">
+                <a:latin typeface="Microsoft YaHei"/>
+              </a:rPr>
+              <a:t>[相对提升概览 30 秒]
+按相对提升百分比排序。最低 FashionIQ shirt +5.2%，最高 GeneCIS change_object +84.5%；所有 bar 全部在 0 线以上——这是我最引以为豪的一张图。</a:t>
+            </a:r>
+          </a:p>
+        </p:txBody>
+      </p:sp>
+      <p:sp>
+        <p:nvSpPr>
+          <p:cNvPr id="4" name="Slide Number Placeholder 3"/>
+          <p:cNvSpPr>
+            <a:spLocks noGrp="1"/>
+          </p:cNvSpPr>
+          <p:nvPr>
+            <p:ph type="sldNum" idx="5" sz="quarter"/>
+          </p:nvPr>
+        </p:nvSpPr>
+        <p:spPr/>
+      </p:sp>
+    </p:spTree>
+  </p:cSld>
+  <p:clrMapOvr>
+    <a:masterClrMapping/>
+  </p:clrMapOvr>
+</p:notes>
+</file>
+
+<file path=ppt/notesSlides/notesSlide15.xml><?xml version="1.0" encoding="utf-8"?>
+<p:notes xmlns:a="http://schemas.openxmlformats.org/drawingml/2006/main" xmlns:p="http://schemas.openxmlformats.org/presentationml/2006/main" xmlns:r="http://schemas.openxmlformats.org/officeDocument/2006/relationships">
+  <p:cSld>
+    <p:spTree>
+      <p:nvGrpSpPr>
+        <p:cNvPr id="1" name=""/>
+        <p:cNvGrpSpPr/>
+        <p:nvPr/>
+      </p:nvGrpSpPr>
+      <p:grpSpPr>
+        <a:xfrm>
+          <a:off x="0" y="0"/>
+          <a:ext cx="0" cy="0"/>
+          <a:chOff x="0" y="0"/>
+          <a:chExt cx="0" cy="0"/>
+        </a:xfrm>
+      </p:grpSpPr>
+      <p:sp>
+        <p:nvSpPr>
+          <p:cNvPr id="2" name="Slide Image Placeholder 1"/>
+          <p:cNvSpPr>
+            <a:spLocks noGrp="1"/>
+          </p:cNvSpPr>
+          <p:nvPr>
+            <p:ph type="sldImg" idx="2"/>
+          </p:nvPr>
+        </p:nvSpPr>
+        <p:spPr/>
+      </p:sp>
+      <p:sp>
+        <p:nvSpPr>
+          <p:cNvPr id="3" name="Notes Placeholder 2"/>
+          <p:cNvSpPr>
+            <a:spLocks noGrp="1"/>
+          </p:cNvSpPr>
+          <p:nvPr>
+            <p:ph type="body" idx="3" sz="quarter"/>
+          </p:nvPr>
+        </p:nvSpPr>
+        <p:spPr/>
+        <p:txBody>
+          <a:bodyPr/>
+          <a:lstStyle/>
+          <a:p>
+            <a:r>
+              <a:rPr sz="1100">
+                <a:latin typeface="Microsoft YaHei"/>
+              </a:rPr>
+              <a:t>[工作贡献 45 秒]
+三点贡献：
+1) 方法论：首次把 Visual Proxy 引入 ZS-CIR，让检索同时获得文本和图像双视角；
+2) 工程：提出 V7 反幻觉 prompt 原则，系统性解决 AI 生成输入回流导致幻觉 ；
+3) 鲁棒性：提出 Description Ensemble，把 V7 的局部峰值转化为 9 数据集一致正向。</a:t>
+            </a:r>
+          </a:p>
+        </p:txBody>
+      </p:sp>
+      <p:sp>
+        <p:nvSpPr>
+          <p:cNvPr id="4" name="Slide Number Placeholder 3"/>
+          <p:cNvSpPr>
+            <a:spLocks noGrp="1"/>
+          </p:cNvSpPr>
+          <p:nvPr>
+            <p:ph type="sldNum" idx="5" sz="quarter"/>
+          </p:nvPr>
+        </p:nvSpPr>
+        <p:spPr/>
+      </p:sp>
+    </p:spTree>
+  </p:cSld>
+  <p:clrMapOvr>
+    <a:masterClrMapping/>
+  </p:clrMapOvr>
+</p:notes>
+</file>
+
+<file path=ppt/notesSlides/notesSlide16.xml><?xml version="1.0" encoding="utf-8"?>
+<p:notes xmlns:a="http://schemas.openxmlformats.org/drawingml/2006/main" xmlns:p="http://schemas.openxmlformats.org/presentationml/2006/main" xmlns:r="http://schemas.openxmlformats.org/officeDocument/2006/relationships">
+  <p:cSld>
+    <p:spTree>
+      <p:nvGrpSpPr>
+        <p:cNvPr id="1" name=""/>
+        <p:cNvGrpSpPr/>
+        <p:nvPr/>
+      </p:nvGrpSpPr>
+      <p:grpSpPr>
+        <a:xfrm>
+          <a:off x="0" y="0"/>
+          <a:ext cx="0" cy="0"/>
+          <a:chOff x="0" y="0"/>
+          <a:chExt cx="0" cy="0"/>
+        </a:xfrm>
+      </p:grpSpPr>
+      <p:sp>
+        <p:nvSpPr>
+          <p:cNvPr id="2" name="Slide Image Placeholder 1"/>
+          <p:cNvSpPr>
+            <a:spLocks noGrp="1"/>
+          </p:cNvSpPr>
+          <p:nvPr>
+            <p:ph type="sldImg" idx="2"/>
+          </p:nvPr>
+        </p:nvSpPr>
+        <p:spPr/>
+      </p:sp>
+      <p:sp>
+        <p:nvSpPr>
+          <p:cNvPr id="3" name="Notes Placeholder 2"/>
+          <p:cNvSpPr>
+            <a:spLocks noGrp="1"/>
+          </p:cNvSpPr>
+          <p:nvPr>
+            <p:ph type="body" idx="3" sz="quarter"/>
+          </p:nvPr>
+        </p:nvSpPr>
+        <p:spPr/>
+        <p:txBody>
+          <a:bodyPr/>
+          <a:lstStyle/>
+          <a:p>
+            <a:r>
+              <a:rPr sz="1100">
+                <a:latin typeface="Microsoft YaHei"/>
+              </a:rPr>
+              <a:t>[局限与未来 45 秒]
+不足：对 MLLM 品牌有依赖、proxy 生成每张 2-3 秒不适合实时、缺人工评估。
+未来：端到端联合训练、换 SigLIP / EVA-CLIP、引入人工评估、扩展到视频 CIR。</a:t>
+            </a:r>
+          </a:p>
+        </p:txBody>
+      </p:sp>
+      <p:sp>
+        <p:nvSpPr>
+          <p:cNvPr id="4" name="Slide Number Placeholder 3"/>
+          <p:cNvSpPr>
+            <a:spLocks noGrp="1"/>
+          </p:cNvSpPr>
+          <p:nvPr>
+            <p:ph type="sldNum" idx="5" sz="quarter"/>
+          </p:nvPr>
+        </p:nvSpPr>
+        <p:spPr/>
+      </p:sp>
+    </p:spTree>
+  </p:cSld>
+  <p:clrMapOvr>
+    <a:masterClrMapping/>
+  </p:clrMapOvr>
+</p:notes>
+</file>
+
+<file path=ppt/notesSlides/notesSlide17.xml><?xml version="1.0" encoding="utf-8"?>
+<p:notes xmlns:a="http://schemas.openxmlformats.org/drawingml/2006/main" xmlns:p="http://schemas.openxmlformats.org/presentationml/2006/main" xmlns:r="http://schemas.openxmlformats.org/officeDocument/2006/relationships">
+  <p:cSld>
+    <p:spTree>
+      <p:nvGrpSpPr>
+        <p:cNvPr id="1" name=""/>
+        <p:cNvGrpSpPr/>
+        <p:nvPr/>
+      </p:nvGrpSpPr>
+      <p:grpSpPr>
+        <a:xfrm>
+          <a:off x="0" y="0"/>
+          <a:ext cx="0" cy="0"/>
+          <a:chOff x="0" y="0"/>
+          <a:chExt cx="0" cy="0"/>
+        </a:xfrm>
+      </p:grpSpPr>
+      <p:sp>
+        <p:nvSpPr>
+          <p:cNvPr id="2" name="Slide Image Placeholder 1"/>
+          <p:cNvSpPr>
+            <a:spLocks noGrp="1"/>
+          </p:cNvSpPr>
+          <p:nvPr>
+            <p:ph type="sldImg" idx="2"/>
+          </p:nvPr>
+        </p:nvSpPr>
+        <p:spPr/>
+      </p:sp>
+      <p:sp>
+        <p:nvSpPr>
+          <p:cNvPr id="3" name="Notes Placeholder 2"/>
+          <p:cNvSpPr>
+            <a:spLocks noGrp="1"/>
+          </p:cNvSpPr>
+          <p:nvPr>
+            <p:ph type="body" idx="3" sz="quarter"/>
+          </p:nvPr>
+        </p:nvSpPr>
+        <p:spPr/>
+        <p:txBody>
+          <a:bodyPr/>
+          <a:lstStyle/>
+          <a:p>
+            <a:r>
+              <a:rPr sz="1100">
+                <a:latin typeface="Microsoft YaHei"/>
+              </a:rPr>
+              <a:t>[致谢 15 秒]
+感谢指导老师 X 老师、感谢同组同学、感谢各位答辩评审老师。汇报完毕，欢迎提问。</a:t>
+            </a:r>
+          </a:p>
+        </p:txBody>
+      </p:sp>
+      <p:sp>
+        <p:nvSpPr>
+          <p:cNvPr id="4" name="Slide Number Placeholder 3"/>
+          <p:cNvSpPr>
+            <a:spLocks noGrp="1"/>
+          </p:cNvSpPr>
+          <p:nvPr>
+            <p:ph type="sldNum" idx="5" sz="quarter"/>
+          </p:nvPr>
+        </p:nvSpPr>
+        <p:spPr/>
+      </p:sp>
+    </p:spTree>
+  </p:cSld>
+  <p:clrMapOvr>
+    <a:masterClrMapping/>
+  </p:clrMapOvr>
+</p:notes>
+</file>
+
+<file path=ppt/notesSlides/notesSlide18.xml><?xml version="1.0" encoding="utf-8"?>
+<p:notes xmlns:a="http://schemas.openxmlformats.org/drawingml/2006/main" xmlns:p="http://schemas.openxmlformats.org/presentationml/2006/main" xmlns:r="http://schemas.openxmlformats.org/officeDocument/2006/relationships">
+  <p:cSld>
+    <p:spTree>
+      <p:nvGrpSpPr>
+        <p:cNvPr id="1" name=""/>
+        <p:cNvGrpSpPr/>
+        <p:nvPr/>
+      </p:nvGrpSpPr>
+      <p:grpSpPr>
+        <a:xfrm>
+          <a:off x="0" y="0"/>
+          <a:ext cx="0" cy="0"/>
+          <a:chOff x="0" y="0"/>
+          <a:chExt cx="0" cy="0"/>
+        </a:xfrm>
+      </p:grpSpPr>
+      <p:sp>
+        <p:nvSpPr>
+          <p:cNvPr id="2" name="Slide Image Placeholder 1"/>
+          <p:cNvSpPr>
+            <a:spLocks noGrp="1"/>
+          </p:cNvSpPr>
+          <p:nvPr>
+            <p:ph type="sldImg" idx="2"/>
+          </p:nvPr>
+        </p:nvSpPr>
+        <p:spPr/>
+      </p:sp>
+      <p:sp>
+        <p:nvSpPr>
+          <p:cNvPr id="3" name="Notes Placeholder 2"/>
+          <p:cNvSpPr>
+            <a:spLocks noGrp="1"/>
+          </p:cNvSpPr>
+          <p:nvPr>
+            <p:ph type="body" idx="3" sz="quarter"/>
+          </p:nvPr>
+        </p:nvSpPr>
+        <p:spPr/>
+        <p:txBody>
+          <a:bodyPr/>
+          <a:lstStyle/>
+          <a:p>
+            <a:r>
+              <a:rPr sz="1100">
+                <a:latin typeface="Microsoft YaHei"/>
+              </a:rPr>
+              <a:t>[备用 slide · Q&amp;A 可切到此页]
+核心数字速查。老师问到具体指标时指向此页精确回答：数据集 9；查询 ~18K；最大 gallery CIRCO 123K；默认 α=0.9 β=0.7；全部 35 指标正向；prompt 迭代 4 轮；API 调用约 15 万次；总成本约 140 元。</a:t>
+            </a:r>
+          </a:p>
+        </p:txBody>
+      </p:sp>
+      <p:sp>
+        <p:nvSpPr>
+          <p:cNvPr id="4" name="Slide Number Placeholder 3"/>
+          <p:cNvSpPr>
+            <a:spLocks noGrp="1"/>
+          </p:cNvSpPr>
+          <p:nvPr>
+            <p:ph type="sldNum" idx="5" sz="quarter"/>
+          </p:nvPr>
+        </p:nvSpPr>
+        <p:spPr/>
+      </p:sp>
+    </p:spTree>
+  </p:cSld>
+  <p:clrMapOvr>
+    <a:masterClrMapping/>
+  </p:clrMapOvr>
+</p:notes>
+</file>
+
+<file path=ppt/notesSlides/notesSlide2.xml><?xml version="1.0" encoding="utf-8"?>
+<p:notes xmlns:a="http://schemas.openxmlformats.org/drawingml/2006/main" xmlns:p="http://schemas.openxmlformats.org/presentationml/2006/main" xmlns:r="http://schemas.openxmlformats.org/officeDocument/2006/relationships">
+  <p:cSld>
+    <p:spTree>
+      <p:nvGrpSpPr>
+        <p:cNvPr id="1" name=""/>
+        <p:cNvGrpSpPr/>
+        <p:nvPr/>
+      </p:nvGrpSpPr>
+      <p:grpSpPr>
+        <a:xfrm>
+          <a:off x="0" y="0"/>
+          <a:ext cx="0" cy="0"/>
+          <a:chOff x="0" y="0"/>
+          <a:chExt cx="0" cy="0"/>
+        </a:xfrm>
+      </p:grpSpPr>
+      <p:sp>
+        <p:nvSpPr>
+          <p:cNvPr id="2" name="Slide Image Placeholder 1"/>
+          <p:cNvSpPr>
+            <a:spLocks noGrp="1"/>
+          </p:cNvSpPr>
+          <p:nvPr>
+            <p:ph type="sldImg" idx="2"/>
+          </p:nvPr>
+        </p:nvSpPr>
+        <p:spPr/>
+      </p:sp>
+      <p:sp>
+        <p:nvSpPr>
+          <p:cNvPr id="3" name="Notes Placeholder 2"/>
+          <p:cNvSpPr>
+            <a:spLocks noGrp="1"/>
+          </p:cNvSpPr>
+          <p:nvPr>
+            <p:ph type="body" idx="3" sz="quarter"/>
+          </p:nvPr>
+        </p:nvSpPr>
+        <p:spPr/>
+        <p:txBody>
+          <a:bodyPr/>
+          <a:lstStyle/>
+          <a:p>
+            <a:r>
+              <a:rPr sz="1100">
+                <a:latin typeface="Microsoft YaHei"/>
+              </a:rPr>
+              <a:t>[目录 15 秒]
+本次汇报分为六部分：研究背景与任务定义、基线方法瓶颈、三路融合方法、实验结果、消融分析、总结与展望。</a:t>
+            </a:r>
+          </a:p>
+        </p:txBody>
+      </p:sp>
+      <p:sp>
+        <p:nvSpPr>
+          <p:cNvPr id="4" name="Slide Number Placeholder 3"/>
+          <p:cNvSpPr>
+            <a:spLocks noGrp="1"/>
+          </p:cNvSpPr>
+          <p:nvPr>
+            <p:ph type="sldNum" idx="5" sz="quarter"/>
+          </p:nvPr>
+        </p:nvSpPr>
+        <p:spPr/>
+      </p:sp>
+    </p:spTree>
+  </p:cSld>
+  <p:clrMapOvr>
+    <a:masterClrMapping/>
+  </p:clrMapOvr>
+</p:notes>
+</file>
+
+<file path=ppt/notesSlides/notesSlide3.xml><?xml version="1.0" encoding="utf-8"?>
+<p:notes xmlns:a="http://schemas.openxmlformats.org/drawingml/2006/main" xmlns:p="http://schemas.openxmlformats.org/presentationml/2006/main" xmlns:r="http://schemas.openxmlformats.org/officeDocument/2006/relationships">
+  <p:cSld>
+    <p:spTree>
+      <p:nvGrpSpPr>
+        <p:cNvPr id="1" name=""/>
+        <p:cNvGrpSpPr/>
+        <p:nvPr/>
+      </p:nvGrpSpPr>
+      <p:grpSpPr>
+        <a:xfrm>
+          <a:off x="0" y="0"/>
+          <a:ext cx="0" cy="0"/>
+          <a:chOff x="0" y="0"/>
+          <a:chExt cx="0" cy="0"/>
+        </a:xfrm>
+      </p:grpSpPr>
+      <p:sp>
+        <p:nvSpPr>
+          <p:cNvPr id="2" name="Slide Image Placeholder 1"/>
+          <p:cNvSpPr>
+            <a:spLocks noGrp="1"/>
+          </p:cNvSpPr>
+          <p:nvPr>
+            <p:ph type="sldImg" idx="2"/>
+          </p:nvPr>
+        </p:nvSpPr>
+        <p:spPr/>
+      </p:sp>
+      <p:sp>
+        <p:nvSpPr>
+          <p:cNvPr id="3" name="Notes Placeholder 2"/>
+          <p:cNvSpPr>
+            <a:spLocks noGrp="1"/>
+          </p:cNvSpPr>
+          <p:nvPr>
+            <p:ph type="body" idx="3" sz="quarter"/>
+          </p:nvPr>
+        </p:nvSpPr>
+        <p:spPr/>
+        <p:txBody>
+          <a:bodyPr/>
+          <a:lstStyle/>
+          <a:p>
+            <a:r>
+              <a:rPr sz="1100">
+                <a:latin typeface="Microsoft YaHei"/>
+              </a:rPr>
+              <a:t>[背景 60 秒]
+组合式图像检索 CIR 接受 参考图 + 修改文本 双模态 query，在大图库中检索满足 修改意图 的目标图。它比纯图搜图更灵活，比 VQA 更面向检索，贴近电商、内容创作等真实场景。
+零样本 ZS-CIR 要求不允许在 CIR 数据集上训练或微调，只能靠预训练好的 CLIP、MLLM 直接推理，省去昂贵的三元组标注，同时在新领域零成本泛化。
+CVPR 2025 的 OSrCIR 用 MLLM + Chain-of-Thought 直接生成目标图描述，是当前 SOTA 之一，也是我改进的基线。</a:t>
+            </a:r>
+          </a:p>
+        </p:txBody>
+      </p:sp>
+      <p:sp>
+        <p:nvSpPr>
+          <p:cNvPr id="4" name="Slide Number Placeholder 3"/>
+          <p:cNvSpPr>
+            <a:spLocks noGrp="1"/>
+          </p:cNvSpPr>
+          <p:nvPr>
+            <p:ph type="sldNum" idx="5" sz="quarter"/>
+          </p:nvPr>
+        </p:nvSpPr>
+        <p:spPr/>
+      </p:sp>
+    </p:spTree>
+  </p:cSld>
+  <p:clrMapOvr>
+    <a:masterClrMapping/>
+  </p:clrMapOvr>
+</p:notes>
+</file>
+
+<file path=ppt/notesSlides/notesSlide4.xml><?xml version="1.0" encoding="utf-8"?>
+<p:notes xmlns:a="http://schemas.openxmlformats.org/drawingml/2006/main" xmlns:p="http://schemas.openxmlformats.org/presentationml/2006/main" xmlns:r="http://schemas.openxmlformats.org/officeDocument/2006/relationships">
+  <p:cSld>
+    <p:spTree>
+      <p:nvGrpSpPr>
+        <p:cNvPr id="1" name=""/>
+        <p:cNvGrpSpPr/>
+        <p:nvPr/>
+      </p:nvGrpSpPr>
+      <p:grpSpPr>
+        <a:xfrm>
+          <a:off x="0" y="0"/>
+          <a:ext cx="0" cy="0"/>
+          <a:chOff x="0" y="0"/>
+          <a:chExt cx="0" cy="0"/>
+        </a:xfrm>
+      </p:grpSpPr>
+      <p:sp>
+        <p:nvSpPr>
+          <p:cNvPr id="2" name="Slide Image Placeholder 1"/>
+          <p:cNvSpPr>
+            <a:spLocks noGrp="1"/>
+          </p:cNvSpPr>
+          <p:nvPr>
+            <p:ph type="sldImg" idx="2"/>
+          </p:nvPr>
+        </p:nvSpPr>
+        <p:spPr/>
+      </p:sp>
+      <p:sp>
+        <p:nvSpPr>
+          <p:cNvPr id="3" name="Notes Placeholder 2"/>
+          <p:cNvSpPr>
+            <a:spLocks noGrp="1"/>
+          </p:cNvSpPr>
+          <p:nvPr>
+            <p:ph type="body" idx="3" sz="quarter"/>
+          </p:nvPr>
+        </p:nvSpPr>
+        <p:spPr/>
+        <p:txBody>
+          <a:bodyPr/>
+          <a:lstStyle/>
+          <a:p>
+            <a:r>
+              <a:rPr sz="1100">
+                <a:latin typeface="Microsoft YaHei"/>
+              </a:rPr>
+              <a:t>[基线瓶颈 60 秒]
+我在复现过程中发现三个痛点：
+第一，OSrCIR 全程在文本空间做检索，缺少图像级 anchor，MLLM 描述一旦偏差就没有纠正途径；
+第二，MLLM 偶尔会对目标的空间布局、颜色深浅理解错位，因为它看不到目标的可视化形态；
+第三，单一描述鲁棒性弱，跨数据集表现不稳定。
+围绕这三点，我设计了三路融合方案。</a:t>
+            </a:r>
+          </a:p>
+        </p:txBody>
+      </p:sp>
+      <p:sp>
+        <p:nvSpPr>
+          <p:cNvPr id="4" name="Slide Number Placeholder 3"/>
+          <p:cNvSpPr>
+            <a:spLocks noGrp="1"/>
+          </p:cNvSpPr>
+          <p:nvPr>
+            <p:ph type="sldNum" idx="5" sz="quarter"/>
+          </p:nvPr>
+        </p:nvSpPr>
+        <p:spPr/>
+      </p:sp>
+    </p:spTree>
+  </p:cSld>
+  <p:clrMapOvr>
+    <a:masterClrMapping/>
+  </p:clrMapOvr>
+</p:notes>
+</file>
+
+<file path=ppt/notesSlides/notesSlide5.xml><?xml version="1.0" encoding="utf-8"?>
+<p:notes xmlns:a="http://schemas.openxmlformats.org/drawingml/2006/main" xmlns:p="http://schemas.openxmlformats.org/presentationml/2006/main" xmlns:r="http://schemas.openxmlformats.org/officeDocument/2006/relationships">
+  <p:cSld>
+    <p:spTree>
+      <p:nvGrpSpPr>
+        <p:cNvPr id="1" name=""/>
+        <p:cNvGrpSpPr/>
+        <p:nvPr/>
+      </p:nvGrpSpPr>
+      <p:grpSpPr>
+        <a:xfrm>
+          <a:off x="0" y="0"/>
+          <a:ext cx="0" cy="0"/>
+          <a:chOff x="0" y="0"/>
+          <a:chExt cx="0" cy="0"/>
+        </a:xfrm>
+      </p:grpSpPr>
+      <p:sp>
+        <p:nvSpPr>
+          <p:cNvPr id="2" name="Slide Image Placeholder 1"/>
+          <p:cNvSpPr>
+            <a:spLocks noGrp="1"/>
+          </p:cNvSpPr>
+          <p:nvPr>
+            <p:ph type="sldImg" idx="2"/>
+          </p:nvPr>
+        </p:nvSpPr>
+        <p:spPr/>
+      </p:sp>
+      <p:sp>
+        <p:nvSpPr>
+          <p:cNvPr id="3" name="Notes Placeholder 2"/>
+          <p:cNvSpPr>
+            <a:spLocks noGrp="1"/>
+          </p:cNvSpPr>
+          <p:nvPr>
+            <p:ph type="body" idx="3" sz="quarter"/>
+          </p:nvPr>
+        </p:nvSpPr>
+        <p:spPr/>
+        <p:txBody>
+          <a:bodyPr/>
+          <a:lstStyle/>
+          <a:p>
+            <a:r>
+              <a:rPr sz="1100">
+                <a:latin typeface="Microsoft YaHei"/>
+              </a:rPr>
+              <a:t>[方法总览 75 秒]
+三路融合可以一句话概括：
+score 等于 α 倍的 文本与图库相似度 加上 (1-α) 倍的 代理图与图库相似度 ；文本特征是 β 倍 CLIP(D1) 加 (1-β) 倍 CLIP(D2) 的加权并归一化。
+第一路：MLLM 思考参考图+修改文本，生成初始描述 D1；
+第二路：把 D1 送给 MiniMax 文生图，得到代理图 proxy，再让 MLLM 看着 (参考图 + 代理图 + 修改文本) 用 V7 反幻觉 prompt 输出精炼描述 D2；
+第三路：代理图本身也参与检索。
+默认 α=0.9、β=0.7 来自 200 样本网格搜索在 9 个数据集上的平均最稳组合。</a:t>
+            </a:r>
+          </a:p>
+        </p:txBody>
+      </p:sp>
+      <p:sp>
+        <p:nvSpPr>
+          <p:cNvPr id="4" name="Slide Number Placeholder 3"/>
+          <p:cNvSpPr>
+            <a:spLocks noGrp="1"/>
+          </p:cNvSpPr>
+          <p:nvPr>
+            <p:ph type="sldNum" idx="5" sz="quarter"/>
+          </p:nvPr>
+        </p:nvSpPr>
+        <p:spPr/>
+      </p:sp>
+    </p:spTree>
+  </p:cSld>
+  <p:clrMapOvr>
+    <a:masterClrMapping/>
+  </p:clrMapOvr>
+</p:notes>
+</file>
+
+<file path=ppt/notesSlides/notesSlide6.xml><?xml version="1.0" encoding="utf-8"?>
+<p:notes xmlns:a="http://schemas.openxmlformats.org/drawingml/2006/main" xmlns:p="http://schemas.openxmlformats.org/presentationml/2006/main" xmlns:r="http://schemas.openxmlformats.org/officeDocument/2006/relationships">
+  <p:cSld>
+    <p:spTree>
+      <p:nvGrpSpPr>
+        <p:cNvPr id="1" name=""/>
+        <p:cNvGrpSpPr/>
+        <p:nvPr/>
+      </p:nvGrpSpPr>
+      <p:grpSpPr>
+        <a:xfrm>
+          <a:off x="0" y="0"/>
+          <a:ext cx="0" cy="0"/>
+          <a:chOff x="0" y="0"/>
+          <a:chExt cx="0" cy="0"/>
+        </a:xfrm>
+      </p:grpSpPr>
+      <p:sp>
+        <p:nvSpPr>
+          <p:cNvPr id="2" name="Slide Image Placeholder 1"/>
+          <p:cNvSpPr>
+            <a:spLocks noGrp="1"/>
+          </p:cNvSpPr>
+          <p:nvPr>
+            <p:ph type="sldImg" idx="2"/>
+          </p:nvPr>
+        </p:nvSpPr>
+        <p:spPr/>
+      </p:sp>
+      <p:sp>
+        <p:nvSpPr>
+          <p:cNvPr id="3" name="Notes Placeholder 2"/>
+          <p:cNvSpPr>
+            <a:spLocks noGrp="1"/>
+          </p:cNvSpPr>
+          <p:nvPr>
+            <p:ph type="body" idx="3" sz="quarter"/>
+          </p:nvPr>
+        </p:nvSpPr>
+        <p:spPr/>
+        <p:txBody>
+          <a:bodyPr/>
+          <a:lstStyle/>
+          <a:p>
+            <a:r>
+              <a:rPr sz="1100">
+                <a:latin typeface="Microsoft YaHei"/>
+              </a:rPr>
+              <a:t>[创新点 1 · Visual Proxy 50 秒]
+核心动机：让 MLLM 的描述 能被看见 。
+做法：把 D1 送进 MiniMax image-01，得到代理图；用 CLIP 编码，参与检索打分。它不需要像真实目标那样精确，只需要 描述同一个语义 即可——因为 CLIP 的相似度是语义级的。
+消融数据：仅加代理图这一路，FashionIQ dress R@10 从 18.3 升到 19.3，确认有效。</a:t>
+            </a:r>
+          </a:p>
+        </p:txBody>
+      </p:sp>
+      <p:sp>
+        <p:nvSpPr>
+          <p:cNvPr id="4" name="Slide Number Placeholder 3"/>
+          <p:cNvSpPr>
+            <a:spLocks noGrp="1"/>
+          </p:cNvSpPr>
+          <p:nvPr>
+            <p:ph type="sldNum" idx="5" sz="quarter"/>
+          </p:nvPr>
+        </p:nvSpPr>
+        <p:spPr/>
+      </p:sp>
+    </p:spTree>
+  </p:cSld>
+  <p:clrMapOvr>
+    <a:masterClrMapping/>
+  </p:clrMapOvr>
+</p:notes>
+</file>
+
+<file path=ppt/notesSlides/notesSlide7.xml><?xml version="1.0" encoding="utf-8"?>
+<p:notes xmlns:a="http://schemas.openxmlformats.org/drawingml/2006/main" xmlns:p="http://schemas.openxmlformats.org/presentationml/2006/main" xmlns:r="http://schemas.openxmlformats.org/officeDocument/2006/relationships">
+  <p:cSld>
+    <p:spTree>
+      <p:nvGrpSpPr>
+        <p:cNvPr id="1" name=""/>
+        <p:cNvGrpSpPr/>
+        <p:nvPr/>
+      </p:nvGrpSpPr>
+      <p:grpSpPr>
+        <a:xfrm>
+          <a:off x="0" y="0"/>
+          <a:ext cx="0" cy="0"/>
+          <a:chOff x="0" y="0"/>
+          <a:chExt cx="0" cy="0"/>
+        </a:xfrm>
+      </p:grpSpPr>
+      <p:sp>
+        <p:nvSpPr>
+          <p:cNvPr id="2" name="Slide Image Placeholder 1"/>
+          <p:cNvSpPr>
+            <a:spLocks noGrp="1"/>
+          </p:cNvSpPr>
+          <p:nvPr>
+            <p:ph type="sldImg" idx="2"/>
+          </p:nvPr>
+        </p:nvSpPr>
+        <p:spPr/>
+      </p:sp>
+      <p:sp>
+        <p:nvSpPr>
+          <p:cNvPr id="3" name="Notes Placeholder 2"/>
+          <p:cNvSpPr>
+            <a:spLocks noGrp="1"/>
+          </p:cNvSpPr>
+          <p:nvPr>
+            <p:ph type="body" idx="3" sz="quarter"/>
+          </p:nvPr>
+        </p:nvSpPr>
+        <p:spPr/>
+        <p:txBody>
+          <a:bodyPr/>
+          <a:lstStyle/>
+          <a:p>
+            <a:r>
+              <a:rPr sz="1100">
+                <a:latin typeface="Microsoft YaHei"/>
+              </a:rPr>
+              <a:t>[创新点 2 · V7 反幻觉 75 秒]
+这是我花时间最多的一步。最初的 prompt 让 MLLM 对比参考图和代理图 综合写新描述 ，结果 CIRR R@10 反而从 67 跌到 64.5，相当于负收益。
+逐样本分析发现：MLLM 把代理图里虚构的背景、材质、光影全写进了描述，长度膨胀到原来的 1.9 倍——这就是幻觉。
+V7 里我写了三条硬性指令：
+1) 明确声明代理图含幻觉细节、不得引用；
+2) 代理图只作为 诊断工具 ，用来判断 修改是否已经发生 ；
+3) 输出必须是短描述、长度不超过修改文本。
+V7 把 CIRR 从 67 拉到 73.5，提升 6.5 个点。</a:t>
+            </a:r>
+          </a:p>
+        </p:txBody>
+      </p:sp>
+      <p:sp>
+        <p:nvSpPr>
+          <p:cNvPr id="4" name="Slide Number Placeholder 3"/>
+          <p:cNvSpPr>
+            <a:spLocks noGrp="1"/>
+          </p:cNvSpPr>
+          <p:nvPr>
+            <p:ph type="sldNum" idx="5" sz="quarter"/>
+          </p:nvPr>
+        </p:nvSpPr>
+        <p:spPr/>
+      </p:sp>
+    </p:spTree>
+  </p:cSld>
+  <p:clrMapOvr>
+    <a:masterClrMapping/>
+  </p:clrMapOvr>
+</p:notes>
+</file>
+
+<file path=ppt/notesSlides/notesSlide8.xml><?xml version="1.0" encoding="utf-8"?>
+<p:notes xmlns:a="http://schemas.openxmlformats.org/drawingml/2006/main" xmlns:p="http://schemas.openxmlformats.org/presentationml/2006/main" xmlns:r="http://schemas.openxmlformats.org/officeDocument/2006/relationships">
+  <p:cSld>
+    <p:spTree>
+      <p:nvGrpSpPr>
+        <p:cNvPr id="1" name=""/>
+        <p:cNvGrpSpPr/>
+        <p:nvPr/>
+      </p:nvGrpSpPr>
+      <p:grpSpPr>
+        <a:xfrm>
+          <a:off x="0" y="0"/>
+          <a:ext cx="0" cy="0"/>
+          <a:chOff x="0" y="0"/>
+          <a:chExt cx="0" cy="0"/>
+        </a:xfrm>
+      </p:grpSpPr>
+      <p:sp>
+        <p:nvSpPr>
+          <p:cNvPr id="2" name="Slide Image Placeholder 1"/>
+          <p:cNvSpPr>
+            <a:spLocks noGrp="1"/>
+          </p:cNvSpPr>
+          <p:nvPr>
+            <p:ph type="sldImg" idx="2"/>
+          </p:nvPr>
+        </p:nvSpPr>
+        <p:spPr/>
+      </p:sp>
+      <p:sp>
+        <p:nvSpPr>
+          <p:cNvPr id="3" name="Notes Placeholder 2"/>
+          <p:cNvSpPr>
+            <a:spLocks noGrp="1"/>
+          </p:cNvSpPr>
+          <p:nvPr>
+            <p:ph type="body" idx="3" sz="quarter"/>
+          </p:nvPr>
+        </p:nvSpPr>
+        <p:spPr/>
+        <p:txBody>
+          <a:bodyPr/>
+          <a:lstStyle/>
+          <a:p>
+            <a:r>
+              <a:rPr sz="1100">
+                <a:latin typeface="Microsoft YaHei"/>
+              </a:rPr>
+              <a:t>[创新点 3 · Description Ensemble 50 秒]
+V7 在 CIRR 表现极佳，但在 FashionIQ shirt 会丢失关键词、退化 4 个点。原因是 完全用 D2 替换 D1 粒度太粗。
+解决：特征级加权融合 f_text = normalize( β · CLIP(D1) + (1-β) · CLIP(D2) )，β=0.7。
+直观上，70% 保留原始描述 兜底 ，30% 让精炼描述做 增量纠偏 。
+结果：牺牲了 CIRR 的峰值，但换来在 9 个数据集上的一致正向。</a:t>
+            </a:r>
+          </a:p>
+        </p:txBody>
+      </p:sp>
+      <p:sp>
+        <p:nvSpPr>
+          <p:cNvPr id="4" name="Slide Number Placeholder 3"/>
+          <p:cNvSpPr>
+            <a:spLocks noGrp="1"/>
+          </p:cNvSpPr>
+          <p:nvPr>
+            <p:ph type="sldNum" idx="5" sz="quarter"/>
+          </p:nvPr>
+        </p:nvSpPr>
+        <p:spPr/>
+      </p:sp>
+    </p:spTree>
+  </p:cSld>
+  <p:clrMapOvr>
+    <a:masterClrMapping/>
+  </p:clrMapOvr>
+</p:notes>
+</file>
+
+<file path=ppt/notesSlides/notesSlide9.xml><?xml version="1.0" encoding="utf-8"?>
+<p:notes xmlns:a="http://schemas.openxmlformats.org/drawingml/2006/main" xmlns:p="http://schemas.openxmlformats.org/presentationml/2006/main" xmlns:r="http://schemas.openxmlformats.org/officeDocument/2006/relationships">
+  <p:cSld>
+    <p:spTree>
+      <p:nvGrpSpPr>
+        <p:cNvPr id="1" name=""/>
+        <p:cNvGrpSpPr/>
+        <p:nvPr/>
+      </p:nvGrpSpPr>
+      <p:grpSpPr>
+        <a:xfrm>
+          <a:off x="0" y="0"/>
+          <a:ext cx="0" cy="0"/>
+          <a:chOff x="0" y="0"/>
+          <a:chExt cx="0" cy="0"/>
+        </a:xfrm>
+      </p:grpSpPr>
+      <p:sp>
+        <p:nvSpPr>
+          <p:cNvPr id="2" name="Slide Image Placeholder 1"/>
+          <p:cNvSpPr>
+            <a:spLocks noGrp="1"/>
+          </p:cNvSpPr>
+          <p:nvPr>
+            <p:ph type="sldImg" idx="2"/>
+          </p:nvPr>
+        </p:nvSpPr>
+        <p:spPr/>
+      </p:sp>
+      <p:sp>
+        <p:nvSpPr>
+          <p:cNvPr id="3" name="Notes Placeholder 2"/>
+          <p:cNvSpPr>
+            <a:spLocks noGrp="1"/>
+          </p:cNvSpPr>
+          <p:nvPr>
+            <p:ph type="body" idx="3" sz="quarter"/>
+          </p:nvPr>
+        </p:nvSpPr>
+        <p:spPr/>
+        <p:txBody>
+          <a:bodyPr/>
+          <a:lstStyle/>
+          <a:p>
+            <a:r>
+              <a:rPr sz="1100">
+                <a:latin typeface="Microsoft YaHei"/>
+              </a:rPr>
+              <a:t>[实验设置 30 秒]
+CLIP 用 ViT-L/14、MLLM 用 Qwen-VL-Max、文生图用 MiniMax；9 个数据集：FashionIQ 三子集 + CIRCO + CIRR + GeneCIS 四子集；所有数据集 baseline 和 3-way 用相同 MLLM、相同 CLIP、相同 gallery；GeneCIS 额外做 per-subset 网格搜索得到 task-adaptive 最优 α/β。</a:t>
+            </a:r>
+          </a:p>
+        </p:txBody>
+      </p:sp>
+      <p:sp>
+        <p:nvSpPr>
+          <p:cNvPr id="4" name="Slide Number Placeholder 3"/>
+          <p:cNvSpPr>
+            <a:spLocks noGrp="1"/>
+          </p:cNvSpPr>
+          <p:nvPr>
+            <p:ph type="sldNum" idx="5" sz="quarter"/>
+          </p:nvPr>
+        </p:nvSpPr>
+        <p:spPr/>
+      </p:sp>
+    </p:spTree>
+  </p:cSld>
+  <p:clrMapOvr>
+    <a:masterClrMapping/>
+  </p:clrMapOvr>
+</p:notes>
 </file>
 
 <file path=ppt/slideLayouts/slideLayout1.xml><?xml version="1.0" encoding="utf-8"?>
@@ -11203,6 +12914,1652 @@
                 <a:latin typeface="Microsoft YaHei"/>
               </a:rPr>
               <a:t>2026 届本科毕业设计</a:t>
+            </a:r>
+          </a:p>
+        </p:txBody>
+      </p:sp>
+    </p:spTree>
+  </p:cSld>
+  <p:clrMapOvr>
+    <a:masterClrMapping/>
+  </p:clrMapOvr>
+</p:sld>
+</file>
+
+<file path=ppt/slides/slide18.xml><?xml version="1.0" encoding="utf-8"?>
+<p:sld xmlns:a="http://schemas.openxmlformats.org/drawingml/2006/main" xmlns:p="http://schemas.openxmlformats.org/presentationml/2006/main" xmlns:r="http://schemas.openxmlformats.org/officeDocument/2006/relationships">
+  <p:cSld>
+    <p:spTree>
+      <p:nvGrpSpPr>
+        <p:cNvPr id="1" name=""/>
+        <p:cNvGrpSpPr/>
+        <p:nvPr/>
+      </p:nvGrpSpPr>
+      <p:grpSpPr/>
+      <p:sp>
+        <p:nvSpPr>
+          <p:cNvPr id="2" name="Rectangle 1"/>
+          <p:cNvSpPr/>
+          <p:nvPr/>
+        </p:nvSpPr>
+        <p:spPr>
+          <a:xfrm>
+            <a:off x="0" y="0"/>
+            <a:ext cx="12191695" cy="6858000"/>
+          </a:xfrm>
+          <a:prstGeom prst="rect">
+            <a:avLst/>
+          </a:prstGeom>
+          <a:solidFill>
+            <a:srgbClr val="F5F3F9"/>
+          </a:solidFill>
+          <a:ln>
+            <a:noFill/>
+          </a:ln>
+          <a:effectLst/>
+        </p:spPr>
+        <p:style>
+          <a:lnRef idx="1">
+            <a:schemeClr val="accent1"/>
+          </a:lnRef>
+          <a:fillRef idx="3">
+            <a:schemeClr val="accent1"/>
+          </a:fillRef>
+          <a:effectRef idx="2">
+            <a:schemeClr val="accent1"/>
+          </a:effectRef>
+          <a:fontRef idx="minor">
+            <a:schemeClr val="lt1"/>
+          </a:fontRef>
+        </p:style>
+        <p:txBody>
+          <a:bodyPr rtlCol="0" anchor="ctr"/>
+          <a:lstStyle/>
+          <a:p>
+            <a:pPr algn="ctr"/>
+          </a:p>
+        </p:txBody>
+      </p:sp>
+      <p:sp>
+        <p:nvSpPr>
+          <p:cNvPr id="3" name="Rectangle 2"/>
+          <p:cNvSpPr/>
+          <p:nvPr/>
+        </p:nvSpPr>
+        <p:spPr>
+          <a:xfrm>
+            <a:off x="0" y="0"/>
+            <a:ext cx="12191695" cy="822960"/>
+          </a:xfrm>
+          <a:prstGeom prst="rect">
+            <a:avLst/>
+          </a:prstGeom>
+          <a:solidFill>
+            <a:srgbClr val="6A1B9A"/>
+          </a:solidFill>
+          <a:ln>
+            <a:noFill/>
+          </a:ln>
+          <a:effectLst/>
+        </p:spPr>
+        <p:style>
+          <a:lnRef idx="1">
+            <a:schemeClr val="accent1"/>
+          </a:lnRef>
+          <a:fillRef idx="3">
+            <a:schemeClr val="accent1"/>
+          </a:fillRef>
+          <a:effectRef idx="2">
+            <a:schemeClr val="accent1"/>
+          </a:effectRef>
+          <a:fontRef idx="minor">
+            <a:schemeClr val="lt1"/>
+          </a:fontRef>
+        </p:style>
+        <p:txBody>
+          <a:bodyPr rtlCol="0" anchor="ctr"/>
+          <a:lstStyle/>
+          <a:p>
+            <a:pPr algn="ctr"/>
+          </a:p>
+        </p:txBody>
+      </p:sp>
+      <p:sp>
+        <p:nvSpPr>
+          <p:cNvPr id="4" name="TextBox 3"/>
+          <p:cNvSpPr txBox="1"/>
+          <p:nvPr/>
+        </p:nvSpPr>
+        <p:spPr>
+          <a:xfrm>
+            <a:off x="548640" y="164592"/>
+            <a:ext cx="10972800" cy="502920"/>
+          </a:xfrm>
+          <a:prstGeom prst="rect">
+            <a:avLst/>
+          </a:prstGeom>
+          <a:noFill/>
+        </p:spPr>
+        <p:txBody>
+          <a:bodyPr wrap="square" anchor="t" lIns="45720" rIns="45720" tIns="18288" bIns="18288">
+            <a:spAutoFit/>
+          </a:bodyPr>
+          <a:lstStyle/>
+          <a:p>
+            <a:pPr algn="l"/>
+            <a:r>
+              <a:rPr sz="2600" b="1">
+                <a:solidFill>
+                  <a:srgbClr val="FFFFFF"/>
+                </a:solidFill>
+                <a:latin typeface="Microsoft YaHei"/>
+              </a:rPr>
+              <a:t>核心数字速查  ·  Answer Cheat-Sheet</a:t>
+            </a:r>
+          </a:p>
+        </p:txBody>
+      </p:sp>
+      <p:sp>
+        <p:nvSpPr>
+          <p:cNvPr id="5" name="TextBox 4"/>
+          <p:cNvSpPr txBox="1"/>
+          <p:nvPr/>
+        </p:nvSpPr>
+        <p:spPr>
+          <a:xfrm>
+            <a:off x="640080" y="1143000"/>
+            <a:ext cx="5486400" cy="365760"/>
+          </a:xfrm>
+          <a:prstGeom prst="rect">
+            <a:avLst/>
+          </a:prstGeom>
+          <a:noFill/>
+        </p:spPr>
+        <p:txBody>
+          <a:bodyPr wrap="square" anchor="t" lIns="45720" rIns="45720" tIns="18288" bIns="18288">
+            <a:spAutoFit/>
+          </a:bodyPr>
+          <a:lstStyle/>
+          <a:p>
+            <a:pPr algn="l"/>
+            <a:r>
+              <a:rPr sz="1700" b="1">
+                <a:solidFill>
+                  <a:srgbClr val="142B5C"/>
+                </a:solidFill>
+                <a:latin typeface="Microsoft YaHei"/>
+              </a:rPr>
+              <a:t>▎ 任务与设置</a:t>
+            </a:r>
+          </a:p>
+        </p:txBody>
+      </p:sp>
+      <p:sp>
+        <p:nvSpPr>
+          <p:cNvPr id="6" name="TextBox 5"/>
+          <p:cNvSpPr txBox="1"/>
+          <p:nvPr/>
+        </p:nvSpPr>
+        <p:spPr>
+          <a:xfrm>
+            <a:off x="640080" y="1554480"/>
+            <a:ext cx="3017520" cy="320040"/>
+          </a:xfrm>
+          <a:prstGeom prst="rect">
+            <a:avLst/>
+          </a:prstGeom>
+          <a:noFill/>
+        </p:spPr>
+        <p:txBody>
+          <a:bodyPr wrap="square" anchor="ctr" lIns="45720" rIns="45720" tIns="18288" bIns="18288">
+            <a:spAutoFit/>
+          </a:bodyPr>
+          <a:lstStyle/>
+          <a:p>
+            <a:pPr algn="l"/>
+            <a:r>
+              <a:rPr sz="1500" b="0">
+                <a:solidFill>
+                  <a:srgbClr val="222222"/>
+                </a:solidFill>
+                <a:latin typeface="Microsoft YaHei"/>
+              </a:rPr>
+              <a:t>数据集总数</a:t>
+            </a:r>
+          </a:p>
+        </p:txBody>
+      </p:sp>
+      <p:sp>
+        <p:nvSpPr>
+          <p:cNvPr id="7" name="TextBox 6"/>
+          <p:cNvSpPr txBox="1"/>
+          <p:nvPr/>
+        </p:nvSpPr>
+        <p:spPr>
+          <a:xfrm>
+            <a:off x="3657600" y="1554480"/>
+            <a:ext cx="2468880" cy="320040"/>
+          </a:xfrm>
+          <a:prstGeom prst="rect">
+            <a:avLst/>
+          </a:prstGeom>
+          <a:noFill/>
+        </p:spPr>
+        <p:txBody>
+          <a:bodyPr wrap="square" anchor="ctr" lIns="45720" rIns="45720" tIns="18288" bIns="18288">
+            <a:spAutoFit/>
+          </a:bodyPr>
+          <a:lstStyle/>
+          <a:p>
+            <a:pPr algn="r"/>
+            <a:r>
+              <a:rPr sz="1600" b="1">
+                <a:solidFill>
+                  <a:srgbClr val="142B5C"/>
+                </a:solidFill>
+                <a:latin typeface="Microsoft YaHei"/>
+              </a:rPr>
+              <a:t>9 个</a:t>
+            </a:r>
+          </a:p>
+        </p:txBody>
+      </p:sp>
+      <p:sp>
+        <p:nvSpPr>
+          <p:cNvPr id="8" name="TextBox 7"/>
+          <p:cNvSpPr txBox="1"/>
+          <p:nvPr/>
+        </p:nvSpPr>
+        <p:spPr>
+          <a:xfrm>
+            <a:off x="640080" y="1901952"/>
+            <a:ext cx="3017520" cy="320040"/>
+          </a:xfrm>
+          <a:prstGeom prst="rect">
+            <a:avLst/>
+          </a:prstGeom>
+          <a:noFill/>
+        </p:spPr>
+        <p:txBody>
+          <a:bodyPr wrap="square" anchor="ctr" lIns="45720" rIns="45720" tIns="18288" bIns="18288">
+            <a:spAutoFit/>
+          </a:bodyPr>
+          <a:lstStyle/>
+          <a:p>
+            <a:pPr algn="l"/>
+            <a:r>
+              <a:rPr sz="1500" b="0">
+                <a:solidFill>
+                  <a:srgbClr val="222222"/>
+                </a:solidFill>
+                <a:latin typeface="Microsoft YaHei"/>
+              </a:rPr>
+              <a:t>FashionIQ 子集</a:t>
+            </a:r>
+          </a:p>
+        </p:txBody>
+      </p:sp>
+      <p:sp>
+        <p:nvSpPr>
+          <p:cNvPr id="9" name="TextBox 8"/>
+          <p:cNvSpPr txBox="1"/>
+          <p:nvPr/>
+        </p:nvSpPr>
+        <p:spPr>
+          <a:xfrm>
+            <a:off x="3657600" y="1901952"/>
+            <a:ext cx="2468880" cy="320040"/>
+          </a:xfrm>
+          <a:prstGeom prst="rect">
+            <a:avLst/>
+          </a:prstGeom>
+          <a:noFill/>
+        </p:spPr>
+        <p:txBody>
+          <a:bodyPr wrap="square" anchor="ctr" lIns="45720" rIns="45720" tIns="18288" bIns="18288">
+            <a:spAutoFit/>
+          </a:bodyPr>
+          <a:lstStyle/>
+          <a:p>
+            <a:pPr algn="r"/>
+            <a:r>
+              <a:rPr sz="1600" b="1">
+                <a:solidFill>
+                  <a:srgbClr val="142B5C"/>
+                </a:solidFill>
+                <a:latin typeface="Microsoft YaHei"/>
+              </a:rPr>
+              <a:t>dress / shirt / toptee</a:t>
+            </a:r>
+          </a:p>
+        </p:txBody>
+      </p:sp>
+      <p:sp>
+        <p:nvSpPr>
+          <p:cNvPr id="10" name="TextBox 9"/>
+          <p:cNvSpPr txBox="1"/>
+          <p:nvPr/>
+        </p:nvSpPr>
+        <p:spPr>
+          <a:xfrm>
+            <a:off x="640080" y="2249424"/>
+            <a:ext cx="3017520" cy="320040"/>
+          </a:xfrm>
+          <a:prstGeom prst="rect">
+            <a:avLst/>
+          </a:prstGeom>
+          <a:noFill/>
+        </p:spPr>
+        <p:txBody>
+          <a:bodyPr wrap="square" anchor="ctr" lIns="45720" rIns="45720" tIns="18288" bIns="18288">
+            <a:spAutoFit/>
+          </a:bodyPr>
+          <a:lstStyle/>
+          <a:p>
+            <a:pPr algn="l"/>
+            <a:r>
+              <a:rPr sz="1500" b="0">
+                <a:solidFill>
+                  <a:srgbClr val="222222"/>
+                </a:solidFill>
+                <a:latin typeface="Microsoft YaHei"/>
+              </a:rPr>
+              <a:t>CIRCO / CIRR</a:t>
+            </a:r>
+          </a:p>
+        </p:txBody>
+      </p:sp>
+      <p:sp>
+        <p:nvSpPr>
+          <p:cNvPr id="11" name="TextBox 10"/>
+          <p:cNvSpPr txBox="1"/>
+          <p:nvPr/>
+        </p:nvSpPr>
+        <p:spPr>
+          <a:xfrm>
+            <a:off x="3657600" y="2249424"/>
+            <a:ext cx="2468880" cy="320040"/>
+          </a:xfrm>
+          <a:prstGeom prst="rect">
+            <a:avLst/>
+          </a:prstGeom>
+          <a:noFill/>
+        </p:spPr>
+        <p:txBody>
+          <a:bodyPr wrap="square" anchor="ctr" lIns="45720" rIns="45720" tIns="18288" bIns="18288">
+            <a:spAutoFit/>
+          </a:bodyPr>
+          <a:lstStyle/>
+          <a:p>
+            <a:pPr algn="r"/>
+            <a:r>
+              <a:rPr sz="1600" b="1">
+                <a:solidFill>
+                  <a:srgbClr val="142B5C"/>
+                </a:solidFill>
+                <a:latin typeface="Microsoft YaHei"/>
+              </a:rPr>
+              <a:t>220 / 4181 queries</a:t>
+            </a:r>
+          </a:p>
+        </p:txBody>
+      </p:sp>
+      <p:sp>
+        <p:nvSpPr>
+          <p:cNvPr id="12" name="TextBox 11"/>
+          <p:cNvSpPr txBox="1"/>
+          <p:nvPr/>
+        </p:nvSpPr>
+        <p:spPr>
+          <a:xfrm>
+            <a:off x="640080" y="2596896"/>
+            <a:ext cx="3017520" cy="320040"/>
+          </a:xfrm>
+          <a:prstGeom prst="rect">
+            <a:avLst/>
+          </a:prstGeom>
+          <a:noFill/>
+        </p:spPr>
+        <p:txBody>
+          <a:bodyPr wrap="square" anchor="ctr" lIns="45720" rIns="45720" tIns="18288" bIns="18288">
+            <a:spAutoFit/>
+          </a:bodyPr>
+          <a:lstStyle/>
+          <a:p>
+            <a:pPr algn="l"/>
+            <a:r>
+              <a:rPr sz="1500" b="0">
+                <a:solidFill>
+                  <a:srgbClr val="222222"/>
+                </a:solidFill>
+                <a:latin typeface="Microsoft YaHei"/>
+              </a:rPr>
+              <a:t>GeneCIS 子集</a:t>
+            </a:r>
+          </a:p>
+        </p:txBody>
+      </p:sp>
+      <p:sp>
+        <p:nvSpPr>
+          <p:cNvPr id="13" name="TextBox 12"/>
+          <p:cNvSpPr txBox="1"/>
+          <p:nvPr/>
+        </p:nvSpPr>
+        <p:spPr>
+          <a:xfrm>
+            <a:off x="3657600" y="2596896"/>
+            <a:ext cx="2468880" cy="320040"/>
+          </a:xfrm>
+          <a:prstGeom prst="rect">
+            <a:avLst/>
+          </a:prstGeom>
+          <a:noFill/>
+        </p:spPr>
+        <p:txBody>
+          <a:bodyPr wrap="square" anchor="ctr" lIns="45720" rIns="45720" tIns="18288" bIns="18288">
+            <a:spAutoFit/>
+          </a:bodyPr>
+          <a:lstStyle/>
+          <a:p>
+            <a:pPr algn="r"/>
+            <a:r>
+              <a:rPr sz="1600" b="1">
+                <a:solidFill>
+                  <a:srgbClr val="142B5C"/>
+                </a:solidFill>
+                <a:latin typeface="Microsoft YaHei"/>
+              </a:rPr>
+              <a:t>ch/fc × obj/attr</a:t>
+            </a:r>
+          </a:p>
+        </p:txBody>
+      </p:sp>
+      <p:sp>
+        <p:nvSpPr>
+          <p:cNvPr id="14" name="TextBox 13"/>
+          <p:cNvSpPr txBox="1"/>
+          <p:nvPr/>
+        </p:nvSpPr>
+        <p:spPr>
+          <a:xfrm>
+            <a:off x="640080" y="2944368"/>
+            <a:ext cx="3017520" cy="320040"/>
+          </a:xfrm>
+          <a:prstGeom prst="rect">
+            <a:avLst/>
+          </a:prstGeom>
+          <a:noFill/>
+        </p:spPr>
+        <p:txBody>
+          <a:bodyPr wrap="square" anchor="ctr" lIns="45720" rIns="45720" tIns="18288" bIns="18288">
+            <a:spAutoFit/>
+          </a:bodyPr>
+          <a:lstStyle/>
+          <a:p>
+            <a:pPr algn="l"/>
+            <a:r>
+              <a:rPr sz="1500" b="0">
+                <a:solidFill>
+                  <a:srgbClr val="222222"/>
+                </a:solidFill>
+                <a:latin typeface="Microsoft YaHei"/>
+              </a:rPr>
+              <a:t>查询总数</a:t>
+            </a:r>
+          </a:p>
+        </p:txBody>
+      </p:sp>
+      <p:sp>
+        <p:nvSpPr>
+          <p:cNvPr id="15" name="TextBox 14"/>
+          <p:cNvSpPr txBox="1"/>
+          <p:nvPr/>
+        </p:nvSpPr>
+        <p:spPr>
+          <a:xfrm>
+            <a:off x="3657600" y="2944368"/>
+            <a:ext cx="2468880" cy="320040"/>
+          </a:xfrm>
+          <a:prstGeom prst="rect">
+            <a:avLst/>
+          </a:prstGeom>
+          <a:noFill/>
+        </p:spPr>
+        <p:txBody>
+          <a:bodyPr wrap="square" anchor="ctr" lIns="45720" rIns="45720" tIns="18288" bIns="18288">
+            <a:spAutoFit/>
+          </a:bodyPr>
+          <a:lstStyle/>
+          <a:p>
+            <a:pPr algn="r"/>
+            <a:r>
+              <a:rPr sz="1600" b="1">
+                <a:solidFill>
+                  <a:srgbClr val="142B5C"/>
+                </a:solidFill>
+                <a:latin typeface="Microsoft YaHei"/>
+              </a:rPr>
+              <a:t>~ 18 K</a:t>
+            </a:r>
+          </a:p>
+        </p:txBody>
+      </p:sp>
+      <p:sp>
+        <p:nvSpPr>
+          <p:cNvPr id="16" name="TextBox 15"/>
+          <p:cNvSpPr txBox="1"/>
+          <p:nvPr/>
+        </p:nvSpPr>
+        <p:spPr>
+          <a:xfrm>
+            <a:off x="640080" y="3291840"/>
+            <a:ext cx="3017520" cy="320040"/>
+          </a:xfrm>
+          <a:prstGeom prst="rect">
+            <a:avLst/>
+          </a:prstGeom>
+          <a:noFill/>
+        </p:spPr>
+        <p:txBody>
+          <a:bodyPr wrap="square" anchor="ctr" lIns="45720" rIns="45720" tIns="18288" bIns="18288">
+            <a:spAutoFit/>
+          </a:bodyPr>
+          <a:lstStyle/>
+          <a:p>
+            <a:pPr algn="l"/>
+            <a:r>
+              <a:rPr sz="1500" b="0">
+                <a:solidFill>
+                  <a:srgbClr val="222222"/>
+                </a:solidFill>
+                <a:latin typeface="Microsoft YaHei"/>
+              </a:rPr>
+              <a:t>最大 gallery</a:t>
+            </a:r>
+          </a:p>
+        </p:txBody>
+      </p:sp>
+      <p:sp>
+        <p:nvSpPr>
+          <p:cNvPr id="17" name="TextBox 16"/>
+          <p:cNvSpPr txBox="1"/>
+          <p:nvPr/>
+        </p:nvSpPr>
+        <p:spPr>
+          <a:xfrm>
+            <a:off x="3657600" y="3291840"/>
+            <a:ext cx="2468880" cy="320040"/>
+          </a:xfrm>
+          <a:prstGeom prst="rect">
+            <a:avLst/>
+          </a:prstGeom>
+          <a:noFill/>
+        </p:spPr>
+        <p:txBody>
+          <a:bodyPr wrap="square" anchor="ctr" lIns="45720" rIns="45720" tIns="18288" bIns="18288">
+            <a:spAutoFit/>
+          </a:bodyPr>
+          <a:lstStyle/>
+          <a:p>
+            <a:pPr algn="r"/>
+            <a:r>
+              <a:rPr sz="1600" b="1">
+                <a:solidFill>
+                  <a:srgbClr val="142B5C"/>
+                </a:solidFill>
+                <a:latin typeface="Microsoft YaHei"/>
+              </a:rPr>
+              <a:t>CIRCO 123 K</a:t>
+            </a:r>
+          </a:p>
+        </p:txBody>
+      </p:sp>
+      <p:sp>
+        <p:nvSpPr>
+          <p:cNvPr id="18" name="TextBox 17"/>
+          <p:cNvSpPr txBox="1"/>
+          <p:nvPr/>
+        </p:nvSpPr>
+        <p:spPr>
+          <a:xfrm>
+            <a:off x="640080" y="3639312"/>
+            <a:ext cx="3017520" cy="320040"/>
+          </a:xfrm>
+          <a:prstGeom prst="rect">
+            <a:avLst/>
+          </a:prstGeom>
+          <a:noFill/>
+        </p:spPr>
+        <p:txBody>
+          <a:bodyPr wrap="square" anchor="ctr" lIns="45720" rIns="45720" tIns="18288" bIns="18288">
+            <a:spAutoFit/>
+          </a:bodyPr>
+          <a:lstStyle/>
+          <a:p>
+            <a:pPr algn="l"/>
+            <a:r>
+              <a:rPr sz="1500" b="0">
+                <a:solidFill>
+                  <a:srgbClr val="222222"/>
+                </a:solidFill>
+                <a:latin typeface="Microsoft YaHei"/>
+              </a:rPr>
+              <a:t>CLIP backbone</a:t>
+            </a:r>
+          </a:p>
+        </p:txBody>
+      </p:sp>
+      <p:sp>
+        <p:nvSpPr>
+          <p:cNvPr id="19" name="TextBox 18"/>
+          <p:cNvSpPr txBox="1"/>
+          <p:nvPr/>
+        </p:nvSpPr>
+        <p:spPr>
+          <a:xfrm>
+            <a:off x="3657600" y="3639312"/>
+            <a:ext cx="2468880" cy="320040"/>
+          </a:xfrm>
+          <a:prstGeom prst="rect">
+            <a:avLst/>
+          </a:prstGeom>
+          <a:noFill/>
+        </p:spPr>
+        <p:txBody>
+          <a:bodyPr wrap="square" anchor="ctr" lIns="45720" rIns="45720" tIns="18288" bIns="18288">
+            <a:spAutoFit/>
+          </a:bodyPr>
+          <a:lstStyle/>
+          <a:p>
+            <a:pPr algn="r"/>
+            <a:r>
+              <a:rPr sz="1600" b="1">
+                <a:solidFill>
+                  <a:srgbClr val="142B5C"/>
+                </a:solidFill>
+                <a:latin typeface="Microsoft YaHei"/>
+              </a:rPr>
+              <a:t>ViT-L/14</a:t>
+            </a:r>
+          </a:p>
+        </p:txBody>
+      </p:sp>
+      <p:sp>
+        <p:nvSpPr>
+          <p:cNvPr id="20" name="TextBox 19"/>
+          <p:cNvSpPr txBox="1"/>
+          <p:nvPr/>
+        </p:nvSpPr>
+        <p:spPr>
+          <a:xfrm>
+            <a:off x="640080" y="3986784"/>
+            <a:ext cx="3017520" cy="320040"/>
+          </a:xfrm>
+          <a:prstGeom prst="rect">
+            <a:avLst/>
+          </a:prstGeom>
+          <a:noFill/>
+        </p:spPr>
+        <p:txBody>
+          <a:bodyPr wrap="square" anchor="ctr" lIns="45720" rIns="45720" tIns="18288" bIns="18288">
+            <a:spAutoFit/>
+          </a:bodyPr>
+          <a:lstStyle/>
+          <a:p>
+            <a:pPr algn="l"/>
+            <a:r>
+              <a:rPr sz="1500" b="0">
+                <a:solidFill>
+                  <a:srgbClr val="222222"/>
+                </a:solidFill>
+                <a:latin typeface="Microsoft YaHei"/>
+              </a:rPr>
+              <a:t>MLLM</a:t>
+            </a:r>
+          </a:p>
+        </p:txBody>
+      </p:sp>
+      <p:sp>
+        <p:nvSpPr>
+          <p:cNvPr id="21" name="TextBox 20"/>
+          <p:cNvSpPr txBox="1"/>
+          <p:nvPr/>
+        </p:nvSpPr>
+        <p:spPr>
+          <a:xfrm>
+            <a:off x="3657600" y="3986784"/>
+            <a:ext cx="2468880" cy="320040"/>
+          </a:xfrm>
+          <a:prstGeom prst="rect">
+            <a:avLst/>
+          </a:prstGeom>
+          <a:noFill/>
+        </p:spPr>
+        <p:txBody>
+          <a:bodyPr wrap="square" anchor="ctr" lIns="45720" rIns="45720" tIns="18288" bIns="18288">
+            <a:spAutoFit/>
+          </a:bodyPr>
+          <a:lstStyle/>
+          <a:p>
+            <a:pPr algn="r"/>
+            <a:r>
+              <a:rPr sz="1600" b="1">
+                <a:solidFill>
+                  <a:srgbClr val="142B5C"/>
+                </a:solidFill>
+                <a:latin typeface="Microsoft YaHei"/>
+              </a:rPr>
+              <a:t>Qwen-VL-Max</a:t>
+            </a:r>
+          </a:p>
+        </p:txBody>
+      </p:sp>
+      <p:sp>
+        <p:nvSpPr>
+          <p:cNvPr id="22" name="TextBox 21"/>
+          <p:cNvSpPr txBox="1"/>
+          <p:nvPr/>
+        </p:nvSpPr>
+        <p:spPr>
+          <a:xfrm>
+            <a:off x="640080" y="4334256"/>
+            <a:ext cx="3017520" cy="320040"/>
+          </a:xfrm>
+          <a:prstGeom prst="rect">
+            <a:avLst/>
+          </a:prstGeom>
+          <a:noFill/>
+        </p:spPr>
+        <p:txBody>
+          <a:bodyPr wrap="square" anchor="ctr" lIns="45720" rIns="45720" tIns="18288" bIns="18288">
+            <a:spAutoFit/>
+          </a:bodyPr>
+          <a:lstStyle/>
+          <a:p>
+            <a:pPr algn="l"/>
+            <a:r>
+              <a:rPr sz="1500" b="0">
+                <a:solidFill>
+                  <a:srgbClr val="222222"/>
+                </a:solidFill>
+                <a:latin typeface="Microsoft YaHei"/>
+              </a:rPr>
+              <a:t>T2I</a:t>
+            </a:r>
+          </a:p>
+        </p:txBody>
+      </p:sp>
+      <p:sp>
+        <p:nvSpPr>
+          <p:cNvPr id="23" name="TextBox 22"/>
+          <p:cNvSpPr txBox="1"/>
+          <p:nvPr/>
+        </p:nvSpPr>
+        <p:spPr>
+          <a:xfrm>
+            <a:off x="3657600" y="4334256"/>
+            <a:ext cx="2468880" cy="320040"/>
+          </a:xfrm>
+          <a:prstGeom prst="rect">
+            <a:avLst/>
+          </a:prstGeom>
+          <a:noFill/>
+        </p:spPr>
+        <p:txBody>
+          <a:bodyPr wrap="square" anchor="ctr" lIns="45720" rIns="45720" tIns="18288" bIns="18288">
+            <a:spAutoFit/>
+          </a:bodyPr>
+          <a:lstStyle/>
+          <a:p>
+            <a:pPr algn="r"/>
+            <a:r>
+              <a:rPr sz="1600" b="1">
+                <a:solidFill>
+                  <a:srgbClr val="142B5C"/>
+                </a:solidFill>
+                <a:latin typeface="Microsoft YaHei"/>
+              </a:rPr>
+              <a:t>MiniMax image-01</a:t>
+            </a:r>
+          </a:p>
+        </p:txBody>
+      </p:sp>
+      <p:sp>
+        <p:nvSpPr>
+          <p:cNvPr id="24" name="TextBox 23"/>
+          <p:cNvSpPr txBox="1"/>
+          <p:nvPr/>
+        </p:nvSpPr>
+        <p:spPr>
+          <a:xfrm>
+            <a:off x="640080" y="4681728"/>
+            <a:ext cx="3017520" cy="320040"/>
+          </a:xfrm>
+          <a:prstGeom prst="rect">
+            <a:avLst/>
+          </a:prstGeom>
+          <a:noFill/>
+        </p:spPr>
+        <p:txBody>
+          <a:bodyPr wrap="square" anchor="ctr" lIns="45720" rIns="45720" tIns="18288" bIns="18288">
+            <a:spAutoFit/>
+          </a:bodyPr>
+          <a:lstStyle/>
+          <a:p>
+            <a:pPr algn="l"/>
+            <a:r>
+              <a:rPr sz="1500" b="0">
+                <a:solidFill>
+                  <a:srgbClr val="222222"/>
+                </a:solidFill>
+                <a:latin typeface="Microsoft YaHei"/>
+              </a:rPr>
+              <a:t>默认 α / β</a:t>
+            </a:r>
+          </a:p>
+        </p:txBody>
+      </p:sp>
+      <p:sp>
+        <p:nvSpPr>
+          <p:cNvPr id="25" name="TextBox 24"/>
+          <p:cNvSpPr txBox="1"/>
+          <p:nvPr/>
+        </p:nvSpPr>
+        <p:spPr>
+          <a:xfrm>
+            <a:off x="3657600" y="4681728"/>
+            <a:ext cx="2468880" cy="320040"/>
+          </a:xfrm>
+          <a:prstGeom prst="rect">
+            <a:avLst/>
+          </a:prstGeom>
+          <a:noFill/>
+        </p:spPr>
+        <p:txBody>
+          <a:bodyPr wrap="square" anchor="ctr" lIns="45720" rIns="45720" tIns="18288" bIns="18288">
+            <a:spAutoFit/>
+          </a:bodyPr>
+          <a:lstStyle/>
+          <a:p>
+            <a:pPr algn="r"/>
+            <a:r>
+              <a:rPr sz="1600" b="1">
+                <a:solidFill>
+                  <a:srgbClr val="142B5C"/>
+                </a:solidFill>
+                <a:latin typeface="Microsoft YaHei"/>
+              </a:rPr>
+              <a:t>0.90 / 0.70</a:t>
+            </a:r>
+          </a:p>
+        </p:txBody>
+      </p:sp>
+      <p:sp>
+        <p:nvSpPr>
+          <p:cNvPr id="26" name="TextBox 25"/>
+          <p:cNvSpPr txBox="1"/>
+          <p:nvPr/>
+        </p:nvSpPr>
+        <p:spPr>
+          <a:xfrm>
+            <a:off x="6400800" y="1143000"/>
+            <a:ext cx="5486400" cy="365760"/>
+          </a:xfrm>
+          <a:prstGeom prst="rect">
+            <a:avLst/>
+          </a:prstGeom>
+          <a:noFill/>
+        </p:spPr>
+        <p:txBody>
+          <a:bodyPr wrap="square" anchor="t" lIns="45720" rIns="45720" tIns="18288" bIns="18288">
+            <a:spAutoFit/>
+          </a:bodyPr>
+          <a:lstStyle/>
+          <a:p>
+            <a:pPr algn="l"/>
+            <a:r>
+              <a:rPr sz="1700" b="1">
+                <a:solidFill>
+                  <a:srgbClr val="142B5C"/>
+                </a:solidFill>
+                <a:latin typeface="Microsoft YaHei"/>
+              </a:rPr>
+              <a:t>▎ 主要结果 (baseline → 3-way)</a:t>
+            </a:r>
+          </a:p>
+        </p:txBody>
+      </p:sp>
+      <p:sp>
+        <p:nvSpPr>
+          <p:cNvPr id="27" name="TextBox 26"/>
+          <p:cNvSpPr txBox="1"/>
+          <p:nvPr/>
+        </p:nvSpPr>
+        <p:spPr>
+          <a:xfrm>
+            <a:off x="6400800" y="1554480"/>
+            <a:ext cx="3017520" cy="320040"/>
+          </a:xfrm>
+          <a:prstGeom prst="rect">
+            <a:avLst/>
+          </a:prstGeom>
+          <a:noFill/>
+        </p:spPr>
+        <p:txBody>
+          <a:bodyPr wrap="square" anchor="ctr" lIns="45720" rIns="45720" tIns="18288" bIns="18288">
+            <a:spAutoFit/>
+          </a:bodyPr>
+          <a:lstStyle/>
+          <a:p>
+            <a:pPr algn="l"/>
+            <a:r>
+              <a:rPr sz="1500" b="0">
+                <a:solidFill>
+                  <a:srgbClr val="222222"/>
+                </a:solidFill>
+                <a:latin typeface="Microsoft YaHei"/>
+              </a:rPr>
+              <a:t>FIQ dress R@10</a:t>
+            </a:r>
+          </a:p>
+        </p:txBody>
+      </p:sp>
+      <p:sp>
+        <p:nvSpPr>
+          <p:cNvPr id="28" name="TextBox 27"/>
+          <p:cNvSpPr txBox="1"/>
+          <p:nvPr/>
+        </p:nvSpPr>
+        <p:spPr>
+          <a:xfrm>
+            <a:off x="9418320" y="1554480"/>
+            <a:ext cx="2468880" cy="320040"/>
+          </a:xfrm>
+          <a:prstGeom prst="rect">
+            <a:avLst/>
+          </a:prstGeom>
+          <a:noFill/>
+        </p:spPr>
+        <p:txBody>
+          <a:bodyPr wrap="square" anchor="ctr" lIns="45720" rIns="45720" tIns="18288" bIns="18288">
+            <a:spAutoFit/>
+          </a:bodyPr>
+          <a:lstStyle/>
+          <a:p>
+            <a:pPr algn="r"/>
+            <a:r>
+              <a:rPr sz="1600" b="1">
+                <a:solidFill>
+                  <a:srgbClr val="E04B3F"/>
+                </a:solidFill>
+                <a:latin typeface="Microsoft YaHei"/>
+              </a:rPr>
+              <a:t>15.80 → 19.29 (+22%)</a:t>
+            </a:r>
+          </a:p>
+        </p:txBody>
+      </p:sp>
+      <p:sp>
+        <p:nvSpPr>
+          <p:cNvPr id="29" name="TextBox 28"/>
+          <p:cNvSpPr txBox="1"/>
+          <p:nvPr/>
+        </p:nvSpPr>
+        <p:spPr>
+          <a:xfrm>
+            <a:off x="6400800" y="1901952"/>
+            <a:ext cx="3017520" cy="320040"/>
+          </a:xfrm>
+          <a:prstGeom prst="rect">
+            <a:avLst/>
+          </a:prstGeom>
+          <a:noFill/>
+        </p:spPr>
+        <p:txBody>
+          <a:bodyPr wrap="square" anchor="ctr" lIns="45720" rIns="45720" tIns="18288" bIns="18288">
+            <a:spAutoFit/>
+          </a:bodyPr>
+          <a:lstStyle/>
+          <a:p>
+            <a:pPr algn="l"/>
+            <a:r>
+              <a:rPr sz="1500" b="0">
+                <a:solidFill>
+                  <a:srgbClr val="222222"/>
+                </a:solidFill>
+                <a:latin typeface="Microsoft YaHei"/>
+              </a:rPr>
+              <a:t>FIQ shirt R@10</a:t>
+            </a:r>
+          </a:p>
+        </p:txBody>
+      </p:sp>
+      <p:sp>
+        <p:nvSpPr>
+          <p:cNvPr id="30" name="TextBox 29"/>
+          <p:cNvSpPr txBox="1"/>
+          <p:nvPr/>
+        </p:nvSpPr>
+        <p:spPr>
+          <a:xfrm>
+            <a:off x="9418320" y="1901952"/>
+            <a:ext cx="2468880" cy="320040"/>
+          </a:xfrm>
+          <a:prstGeom prst="rect">
+            <a:avLst/>
+          </a:prstGeom>
+          <a:noFill/>
+        </p:spPr>
+        <p:txBody>
+          <a:bodyPr wrap="square" anchor="ctr" lIns="45720" rIns="45720" tIns="18288" bIns="18288">
+            <a:spAutoFit/>
+          </a:bodyPr>
+          <a:lstStyle/>
+          <a:p>
+            <a:pPr algn="r"/>
+            <a:r>
+              <a:rPr sz="1600" b="1">
+                <a:solidFill>
+                  <a:srgbClr val="E04B3F"/>
+                </a:solidFill>
+                <a:latin typeface="Microsoft YaHei"/>
+              </a:rPr>
+              <a:t>26.00 → 27.35 (+5%)</a:t>
+            </a:r>
+          </a:p>
+        </p:txBody>
+      </p:sp>
+      <p:sp>
+        <p:nvSpPr>
+          <p:cNvPr id="31" name="TextBox 30"/>
+          <p:cNvSpPr txBox="1"/>
+          <p:nvPr/>
+        </p:nvSpPr>
+        <p:spPr>
+          <a:xfrm>
+            <a:off x="6400800" y="2249424"/>
+            <a:ext cx="3017520" cy="320040"/>
+          </a:xfrm>
+          <a:prstGeom prst="rect">
+            <a:avLst/>
+          </a:prstGeom>
+          <a:noFill/>
+        </p:spPr>
+        <p:txBody>
+          <a:bodyPr wrap="square" anchor="ctr" lIns="45720" rIns="45720" tIns="18288" bIns="18288">
+            <a:spAutoFit/>
+          </a:bodyPr>
+          <a:lstStyle/>
+          <a:p>
+            <a:pPr algn="l"/>
+            <a:r>
+              <a:rPr sz="1500" b="0">
+                <a:solidFill>
+                  <a:srgbClr val="222222"/>
+                </a:solidFill>
+                <a:latin typeface="Microsoft YaHei"/>
+              </a:rPr>
+              <a:t>FIQ toptee R@10</a:t>
+            </a:r>
+          </a:p>
+        </p:txBody>
+      </p:sp>
+      <p:sp>
+        <p:nvSpPr>
+          <p:cNvPr id="32" name="TextBox 31"/>
+          <p:cNvSpPr txBox="1"/>
+          <p:nvPr/>
+        </p:nvSpPr>
+        <p:spPr>
+          <a:xfrm>
+            <a:off x="9418320" y="2249424"/>
+            <a:ext cx="2468880" cy="320040"/>
+          </a:xfrm>
+          <a:prstGeom prst="rect">
+            <a:avLst/>
+          </a:prstGeom>
+          <a:noFill/>
+        </p:spPr>
+        <p:txBody>
+          <a:bodyPr wrap="square" anchor="ctr" lIns="45720" rIns="45720" tIns="18288" bIns="18288">
+            <a:spAutoFit/>
+          </a:bodyPr>
+          <a:lstStyle/>
+          <a:p>
+            <a:pPr algn="r"/>
+            <a:r>
+              <a:rPr sz="1600" b="1">
+                <a:solidFill>
+                  <a:srgbClr val="E04B3F"/>
+                </a:solidFill>
+                <a:latin typeface="Microsoft YaHei"/>
+              </a:rPr>
+              <a:t>23.09 → 27.35 (+18%)</a:t>
+            </a:r>
+          </a:p>
+        </p:txBody>
+      </p:sp>
+      <p:sp>
+        <p:nvSpPr>
+          <p:cNvPr id="33" name="TextBox 32"/>
+          <p:cNvSpPr txBox="1"/>
+          <p:nvPr/>
+        </p:nvSpPr>
+        <p:spPr>
+          <a:xfrm>
+            <a:off x="6400800" y="2596896"/>
+            <a:ext cx="3017520" cy="320040"/>
+          </a:xfrm>
+          <a:prstGeom prst="rect">
+            <a:avLst/>
+          </a:prstGeom>
+          <a:noFill/>
+        </p:spPr>
+        <p:txBody>
+          <a:bodyPr wrap="square" anchor="ctr" lIns="45720" rIns="45720" tIns="18288" bIns="18288">
+            <a:spAutoFit/>
+          </a:bodyPr>
+          <a:lstStyle/>
+          <a:p>
+            <a:pPr algn="l"/>
+            <a:r>
+              <a:rPr sz="1500" b="0">
+                <a:solidFill>
+                  <a:srgbClr val="222222"/>
+                </a:solidFill>
+                <a:latin typeface="Microsoft YaHei"/>
+              </a:rPr>
+              <a:t>CIRCO mAP@10</a:t>
+            </a:r>
+          </a:p>
+        </p:txBody>
+      </p:sp>
+      <p:sp>
+        <p:nvSpPr>
+          <p:cNvPr id="34" name="TextBox 33"/>
+          <p:cNvSpPr txBox="1"/>
+          <p:nvPr/>
+        </p:nvSpPr>
+        <p:spPr>
+          <a:xfrm>
+            <a:off x="9418320" y="2596896"/>
+            <a:ext cx="2468880" cy="320040"/>
+          </a:xfrm>
+          <a:prstGeom prst="rect">
+            <a:avLst/>
+          </a:prstGeom>
+          <a:noFill/>
+        </p:spPr>
+        <p:txBody>
+          <a:bodyPr wrap="square" anchor="ctr" lIns="45720" rIns="45720" tIns="18288" bIns="18288">
+            <a:spAutoFit/>
+          </a:bodyPr>
+          <a:lstStyle/>
+          <a:p>
+            <a:pPr algn="r"/>
+            <a:r>
+              <a:rPr sz="1600" b="1">
+                <a:solidFill>
+                  <a:srgbClr val="E04B3F"/>
+                </a:solidFill>
+                <a:latin typeface="Microsoft YaHei"/>
+              </a:rPr>
+              <a:t>16.21 → 21.26 (+31%)</a:t>
+            </a:r>
+          </a:p>
+        </p:txBody>
+      </p:sp>
+      <p:sp>
+        <p:nvSpPr>
+          <p:cNvPr id="35" name="TextBox 34"/>
+          <p:cNvSpPr txBox="1"/>
+          <p:nvPr/>
+        </p:nvSpPr>
+        <p:spPr>
+          <a:xfrm>
+            <a:off x="6400800" y="2944368"/>
+            <a:ext cx="3017520" cy="320040"/>
+          </a:xfrm>
+          <a:prstGeom prst="rect">
+            <a:avLst/>
+          </a:prstGeom>
+          <a:noFill/>
+        </p:spPr>
+        <p:txBody>
+          <a:bodyPr wrap="square" anchor="ctr" lIns="45720" rIns="45720" tIns="18288" bIns="18288">
+            <a:spAutoFit/>
+          </a:bodyPr>
+          <a:lstStyle/>
+          <a:p>
+            <a:pPr algn="l"/>
+            <a:r>
+              <a:rPr sz="1500" b="0">
+                <a:solidFill>
+                  <a:srgbClr val="222222"/>
+                </a:solidFill>
+                <a:latin typeface="Microsoft YaHei"/>
+              </a:rPr>
+              <a:t>CIRR R@1</a:t>
+            </a:r>
+          </a:p>
+        </p:txBody>
+      </p:sp>
+      <p:sp>
+        <p:nvSpPr>
+          <p:cNvPr id="36" name="TextBox 35"/>
+          <p:cNvSpPr txBox="1"/>
+          <p:nvPr/>
+        </p:nvSpPr>
+        <p:spPr>
+          <a:xfrm>
+            <a:off x="9418320" y="2944368"/>
+            <a:ext cx="2468880" cy="320040"/>
+          </a:xfrm>
+          <a:prstGeom prst="rect">
+            <a:avLst/>
+          </a:prstGeom>
+          <a:noFill/>
+        </p:spPr>
+        <p:txBody>
+          <a:bodyPr wrap="square" anchor="ctr" lIns="45720" rIns="45720" tIns="18288" bIns="18288">
+            <a:spAutoFit/>
+          </a:bodyPr>
+          <a:lstStyle/>
+          <a:p>
+            <a:pPr algn="r"/>
+            <a:r>
+              <a:rPr sz="1600" b="1">
+                <a:solidFill>
+                  <a:srgbClr val="E04B3F"/>
+                </a:solidFill>
+                <a:latin typeface="Microsoft YaHei"/>
+              </a:rPr>
+              <a:t>22.96 → 25.90 (+13%)</a:t>
+            </a:r>
+          </a:p>
+        </p:txBody>
+      </p:sp>
+      <p:sp>
+        <p:nvSpPr>
+          <p:cNvPr id="37" name="TextBox 36"/>
+          <p:cNvSpPr txBox="1"/>
+          <p:nvPr/>
+        </p:nvSpPr>
+        <p:spPr>
+          <a:xfrm>
+            <a:off x="6400800" y="3291840"/>
+            <a:ext cx="3017520" cy="320040"/>
+          </a:xfrm>
+          <a:prstGeom prst="rect">
+            <a:avLst/>
+          </a:prstGeom>
+          <a:noFill/>
+        </p:spPr>
+        <p:txBody>
+          <a:bodyPr wrap="square" anchor="ctr" lIns="45720" rIns="45720" tIns="18288" bIns="18288">
+            <a:spAutoFit/>
+          </a:bodyPr>
+          <a:lstStyle/>
+          <a:p>
+            <a:pPr algn="l"/>
+            <a:r>
+              <a:rPr sz="1500" b="0">
+                <a:solidFill>
+                  <a:srgbClr val="222222"/>
+                </a:solidFill>
+                <a:latin typeface="Microsoft YaHei"/>
+              </a:rPr>
+              <a:t>GeneCIS ch_obj R@1</a:t>
+            </a:r>
+          </a:p>
+        </p:txBody>
+      </p:sp>
+      <p:sp>
+        <p:nvSpPr>
+          <p:cNvPr id="38" name="TextBox 37"/>
+          <p:cNvSpPr txBox="1"/>
+          <p:nvPr/>
+        </p:nvSpPr>
+        <p:spPr>
+          <a:xfrm>
+            <a:off x="9418320" y="3291840"/>
+            <a:ext cx="2468880" cy="320040"/>
+          </a:xfrm>
+          <a:prstGeom prst="rect">
+            <a:avLst/>
+          </a:prstGeom>
+          <a:noFill/>
+        </p:spPr>
+        <p:txBody>
+          <a:bodyPr wrap="square" anchor="ctr" lIns="45720" rIns="45720" tIns="18288" bIns="18288">
+            <a:spAutoFit/>
+          </a:bodyPr>
+          <a:lstStyle/>
+          <a:p>
+            <a:pPr algn="r"/>
+            <a:r>
+              <a:rPr sz="1600" b="1">
+                <a:solidFill>
+                  <a:srgbClr val="E04B3F"/>
+                </a:solidFill>
+                <a:latin typeface="Microsoft YaHei"/>
+              </a:rPr>
+              <a:t>13.83 → 25.51 (+85%)</a:t>
+            </a:r>
+          </a:p>
+        </p:txBody>
+      </p:sp>
+      <p:sp>
+        <p:nvSpPr>
+          <p:cNvPr id="39" name="TextBox 38"/>
+          <p:cNvSpPr txBox="1"/>
+          <p:nvPr/>
+        </p:nvSpPr>
+        <p:spPr>
+          <a:xfrm>
+            <a:off x="6400800" y="3639312"/>
+            <a:ext cx="3017520" cy="320040"/>
+          </a:xfrm>
+          <a:prstGeom prst="rect">
+            <a:avLst/>
+          </a:prstGeom>
+          <a:noFill/>
+        </p:spPr>
+        <p:txBody>
+          <a:bodyPr wrap="square" anchor="ctr" lIns="45720" rIns="45720" tIns="18288" bIns="18288">
+            <a:spAutoFit/>
+          </a:bodyPr>
+          <a:lstStyle/>
+          <a:p>
+            <a:pPr algn="l"/>
+            <a:r>
+              <a:rPr sz="1500" b="0">
+                <a:solidFill>
+                  <a:srgbClr val="222222"/>
+                </a:solidFill>
+                <a:latin typeface="Microsoft YaHei"/>
+              </a:rPr>
+              <a:t>GeneCIS fc_obj R@1</a:t>
+            </a:r>
+          </a:p>
+        </p:txBody>
+      </p:sp>
+      <p:sp>
+        <p:nvSpPr>
+          <p:cNvPr id="40" name="TextBox 39"/>
+          <p:cNvSpPr txBox="1"/>
+          <p:nvPr/>
+        </p:nvSpPr>
+        <p:spPr>
+          <a:xfrm>
+            <a:off x="9418320" y="3639312"/>
+            <a:ext cx="2468880" cy="320040"/>
+          </a:xfrm>
+          <a:prstGeom prst="rect">
+            <a:avLst/>
+          </a:prstGeom>
+          <a:noFill/>
+        </p:spPr>
+        <p:txBody>
+          <a:bodyPr wrap="square" anchor="ctr" lIns="45720" rIns="45720" tIns="18288" bIns="18288">
+            <a:spAutoFit/>
+          </a:bodyPr>
+          <a:lstStyle/>
+          <a:p>
+            <a:pPr algn="r"/>
+            <a:r>
+              <a:rPr sz="1600" b="1">
+                <a:solidFill>
+                  <a:srgbClr val="E04B3F"/>
+                </a:solidFill>
+                <a:latin typeface="Microsoft YaHei"/>
+              </a:rPr>
+              <a:t>16.02 → 23.62 (+47%)</a:t>
+            </a:r>
+          </a:p>
+        </p:txBody>
+      </p:sp>
+      <p:sp>
+        <p:nvSpPr>
+          <p:cNvPr id="41" name="TextBox 40"/>
+          <p:cNvSpPr txBox="1"/>
+          <p:nvPr/>
+        </p:nvSpPr>
+        <p:spPr>
+          <a:xfrm>
+            <a:off x="6400800" y="3986784"/>
+            <a:ext cx="3017520" cy="320040"/>
+          </a:xfrm>
+          <a:prstGeom prst="rect">
+            <a:avLst/>
+          </a:prstGeom>
+          <a:noFill/>
+        </p:spPr>
+        <p:txBody>
+          <a:bodyPr wrap="square" anchor="ctr" lIns="45720" rIns="45720" tIns="18288" bIns="18288">
+            <a:spAutoFit/>
+          </a:bodyPr>
+          <a:lstStyle/>
+          <a:p>
+            <a:pPr algn="l"/>
+            <a:r>
+              <a:rPr sz="1500" b="0">
+                <a:solidFill>
+                  <a:srgbClr val="222222"/>
+                </a:solidFill>
+                <a:latin typeface="Microsoft YaHei"/>
+              </a:rPr>
+              <a:t>GeneCIS ch_attr R@1</a:t>
+            </a:r>
+          </a:p>
+        </p:txBody>
+      </p:sp>
+      <p:sp>
+        <p:nvSpPr>
+          <p:cNvPr id="42" name="TextBox 41"/>
+          <p:cNvSpPr txBox="1"/>
+          <p:nvPr/>
+        </p:nvSpPr>
+        <p:spPr>
+          <a:xfrm>
+            <a:off x="9418320" y="3986784"/>
+            <a:ext cx="2468880" cy="320040"/>
+          </a:xfrm>
+          <a:prstGeom prst="rect">
+            <a:avLst/>
+          </a:prstGeom>
+          <a:noFill/>
+        </p:spPr>
+        <p:txBody>
+          <a:bodyPr wrap="square" anchor="ctr" lIns="45720" rIns="45720" tIns="18288" bIns="18288">
+            <a:spAutoFit/>
+          </a:bodyPr>
+          <a:lstStyle/>
+          <a:p>
+            <a:pPr algn="r"/>
+            <a:r>
+              <a:rPr sz="1600" b="1">
+                <a:solidFill>
+                  <a:srgbClr val="E04B3F"/>
+                </a:solidFill>
+                <a:latin typeface="Microsoft YaHei"/>
+              </a:rPr>
+              <a:t>12.65 → 21.79 (+72%)</a:t>
+            </a:r>
+          </a:p>
+        </p:txBody>
+      </p:sp>
+      <p:sp>
+        <p:nvSpPr>
+          <p:cNvPr id="43" name="TextBox 42"/>
+          <p:cNvSpPr txBox="1"/>
+          <p:nvPr/>
+        </p:nvSpPr>
+        <p:spPr>
+          <a:xfrm>
+            <a:off x="6400800" y="4334256"/>
+            <a:ext cx="3017520" cy="320040"/>
+          </a:xfrm>
+          <a:prstGeom prst="rect">
+            <a:avLst/>
+          </a:prstGeom>
+          <a:noFill/>
+        </p:spPr>
+        <p:txBody>
+          <a:bodyPr wrap="square" anchor="ctr" lIns="45720" rIns="45720" tIns="18288" bIns="18288">
+            <a:spAutoFit/>
+          </a:bodyPr>
+          <a:lstStyle/>
+          <a:p>
+            <a:pPr algn="l"/>
+            <a:r>
+              <a:rPr sz="1500" b="0">
+                <a:solidFill>
+                  <a:srgbClr val="222222"/>
+                </a:solidFill>
+                <a:latin typeface="Microsoft YaHei"/>
+              </a:rPr>
+              <a:t>GeneCIS fc_attr R@1</a:t>
+            </a:r>
+          </a:p>
+        </p:txBody>
+      </p:sp>
+      <p:sp>
+        <p:nvSpPr>
+          <p:cNvPr id="44" name="TextBox 43"/>
+          <p:cNvSpPr txBox="1"/>
+          <p:nvPr/>
+        </p:nvSpPr>
+        <p:spPr>
+          <a:xfrm>
+            <a:off x="9418320" y="4334256"/>
+            <a:ext cx="2468880" cy="320040"/>
+          </a:xfrm>
+          <a:prstGeom prst="rect">
+            <a:avLst/>
+          </a:prstGeom>
+          <a:noFill/>
+        </p:spPr>
+        <p:txBody>
+          <a:bodyPr wrap="square" anchor="ctr" lIns="45720" rIns="45720" tIns="18288" bIns="18288">
+            <a:spAutoFit/>
+          </a:bodyPr>
+          <a:lstStyle/>
+          <a:p>
+            <a:pPr algn="r"/>
+            <a:r>
+              <a:rPr sz="1600" b="1">
+                <a:solidFill>
+                  <a:srgbClr val="E04B3F"/>
+                </a:solidFill>
+                <a:latin typeface="Microsoft YaHei"/>
+              </a:rPr>
+              <a:t>18.82 → 27.83 (+48%)</a:t>
+            </a:r>
+          </a:p>
+        </p:txBody>
+      </p:sp>
+      <p:sp>
+        <p:nvSpPr>
+          <p:cNvPr id="45" name="TextBox 44"/>
+          <p:cNvSpPr txBox="1"/>
+          <p:nvPr/>
+        </p:nvSpPr>
+        <p:spPr>
+          <a:xfrm>
+            <a:off x="6400800" y="4681728"/>
+            <a:ext cx="3017520" cy="320040"/>
+          </a:xfrm>
+          <a:prstGeom prst="rect">
+            <a:avLst/>
+          </a:prstGeom>
+          <a:noFill/>
+        </p:spPr>
+        <p:txBody>
+          <a:bodyPr wrap="square" anchor="ctr" lIns="45720" rIns="45720" tIns="18288" bIns="18288">
+            <a:spAutoFit/>
+          </a:bodyPr>
+          <a:lstStyle/>
+          <a:p>
+            <a:pPr algn="l"/>
+            <a:r>
+              <a:rPr sz="1500" b="0">
+                <a:solidFill>
+                  <a:srgbClr val="222222"/>
+                </a:solidFill>
+                <a:latin typeface="Microsoft YaHei"/>
+              </a:rPr>
+              <a:t>总指标</a:t>
+            </a:r>
+          </a:p>
+        </p:txBody>
+      </p:sp>
+      <p:sp>
+        <p:nvSpPr>
+          <p:cNvPr id="46" name="TextBox 45"/>
+          <p:cNvSpPr txBox="1"/>
+          <p:nvPr/>
+        </p:nvSpPr>
+        <p:spPr>
+          <a:xfrm>
+            <a:off x="9418320" y="4681728"/>
+            <a:ext cx="2468880" cy="320040"/>
+          </a:xfrm>
+          <a:prstGeom prst="rect">
+            <a:avLst/>
+          </a:prstGeom>
+          <a:noFill/>
+        </p:spPr>
+        <p:txBody>
+          <a:bodyPr wrap="square" anchor="ctr" lIns="45720" rIns="45720" tIns="18288" bIns="18288">
+            <a:spAutoFit/>
+          </a:bodyPr>
+          <a:lstStyle/>
+          <a:p>
+            <a:pPr algn="r"/>
+            <a:r>
+              <a:rPr sz="1600" b="1">
+                <a:solidFill>
+                  <a:srgbClr val="E04B3F"/>
+                </a:solidFill>
+                <a:latin typeface="Microsoft YaHei"/>
+              </a:rPr>
+              <a:t>35 / 35 正向</a:t>
+            </a:r>
+          </a:p>
+        </p:txBody>
+      </p:sp>
+      <p:sp>
+        <p:nvSpPr>
+          <p:cNvPr id="47" name="TextBox 46"/>
+          <p:cNvSpPr txBox="1"/>
+          <p:nvPr/>
+        </p:nvSpPr>
+        <p:spPr>
+          <a:xfrm>
+            <a:off x="640080" y="5897880"/>
+            <a:ext cx="10972800" cy="411480"/>
+          </a:xfrm>
+          <a:prstGeom prst="rect">
+            <a:avLst/>
+          </a:prstGeom>
+          <a:noFill/>
+        </p:spPr>
+        <p:txBody>
+          <a:bodyPr wrap="square" anchor="t" lIns="45720" rIns="45720" tIns="18288" bIns="18288">
+            <a:spAutoFit/>
+          </a:bodyPr>
+          <a:lstStyle/>
+          <a:p>
+            <a:pPr algn="ctr"/>
+            <a:r>
+              <a:rPr sz="1300" b="0">
+                <a:solidFill>
+                  <a:srgbClr val="555555"/>
+                </a:solidFill>
+                <a:latin typeface="Microsoft YaHei"/>
+              </a:rPr>
+              <a:t>规模 · prompt 迭代 4 轮  |  API 调用 ~ 15 万次  |  总成本 ≈ 140 元</a:t>
             </a:r>
           </a:p>
         </p:txBody>
@@ -20988,4 +24345,324 @@
   </a:objectDefaults>
   <a:extraClrSchemeLst/>
 </a:theme>
+</file>
+
+<file path=ppt/theme/theme2.xml><?xml version="1.0" encoding="utf-8"?>
+<a:theme xmlns:a="http://schemas.openxmlformats.org/drawingml/2006/main" name="Office Theme">
+  <a:themeElements>
+    <a:clrScheme name="Office">
+      <a:dk1>
+        <a:sysClr val="windowText" lastClr="000000"/>
+      </a:dk1>
+      <a:lt1>
+        <a:sysClr val="window" lastClr="FFFFFF"/>
+      </a:lt1>
+      <a:dk2>
+        <a:srgbClr val="1F497D"/>
+      </a:dk2>
+      <a:lt2>
+        <a:srgbClr val="EEECE1"/>
+      </a:lt2>
+      <a:accent1>
+        <a:srgbClr val="4F81BD"/>
+      </a:accent1>
+      <a:accent2>
+        <a:srgbClr val="C0504D"/>
+      </a:accent2>
+      <a:accent3>
+        <a:srgbClr val="9BBB59"/>
+      </a:accent3>
+      <a:accent4>
+        <a:srgbClr val="8064A2"/>
+      </a:accent4>
+      <a:accent5>
+        <a:srgbClr val="4BACC6"/>
+      </a:accent5>
+      <a:accent6>
+        <a:srgbClr val="F79646"/>
+      </a:accent6>
+      <a:hlink>
+        <a:srgbClr val="0000FF"/>
+      </a:hlink>
+      <a:folHlink>
+        <a:srgbClr val="800080"/>
+      </a:folHlink>
+    </a:clrScheme>
+    <a:fontScheme name="Office">
+      <a:majorFont>
+        <a:latin typeface="Calibri"/>
+        <a:ea typeface=""/>
+        <a:cs typeface=""/>
+        <a:font script="Jpan" typeface="ＭＳ Ｐゴシック"/>
+        <a:font script="Hang" typeface="맑은 고딕"/>
+        <a:font script="Hans" typeface="宋体"/>
+        <a:font script="Hant" typeface="新細明體"/>
+        <a:font script="Arab" typeface="Times New Roman"/>
+        <a:font script="Hebr" typeface="Times New Roman"/>
+        <a:font script="Thai" typeface="Angsana New"/>
+        <a:font script="Ethi" typeface="Nyala"/>
+        <a:font script="Beng" typeface="Vrinda"/>
+        <a:font script="Gujr" typeface="Shruti"/>
+        <a:font script="Khmr" typeface="MoolBoran"/>
+        <a:font script="Knda" typeface="Tunga"/>
+        <a:font script="Guru" typeface="Raavi"/>
+        <a:font script="Cans" typeface="Euphemia"/>
+        <a:font script="Cher" typeface="Plantagenet Cherokee"/>
+        <a:font script="Yiii" typeface="Microsoft Yi Baiti"/>
+        <a:font script="Tibt" typeface="Microsoft Himalaya"/>
+        <a:font script="Thaa" typeface="MV Boli"/>
+        <a:font script="Deva" typeface="Mangal"/>
+        <a:font script="Telu" typeface="Gautami"/>
+        <a:font script="Taml" typeface="Latha"/>
+        <a:font script="Syrc" typeface="Estrangelo Edessa"/>
+        <a:font script="Orya" typeface="Kalinga"/>
+        <a:font script="Mlym" typeface="Kartika"/>
+        <a:font script="Laoo" typeface="DokChampa"/>
+        <a:font script="Sinh" typeface="Iskoola Pota"/>
+        <a:font script="Mong" typeface="Mongolian Baiti"/>
+        <a:font script="Viet" typeface="Times New Roman"/>
+        <a:font script="Uigh" typeface="Microsoft Uighur"/>
+        <a:font script="Geor" typeface="Sylfaen"/>
+      </a:majorFont>
+      <a:minorFont>
+        <a:latin typeface="Calibri"/>
+        <a:ea typeface=""/>
+        <a:cs typeface=""/>
+        <a:font script="Jpan" typeface="ＭＳ Ｐゴシック"/>
+        <a:font script="Hang" typeface="맑은 고딕"/>
+        <a:font script="Hans" typeface="宋体"/>
+        <a:font script="Hant" typeface="新細明體"/>
+        <a:font script="Arab" typeface="Arial"/>
+        <a:font script="Hebr" typeface="Arial"/>
+        <a:font script="Thai" typeface="Cordia New"/>
+        <a:font script="Ethi" typeface="Nyala"/>
+        <a:font script="Beng" typeface="Vrinda"/>
+        <a:font script="Gujr" typeface="Shruti"/>
+        <a:font script="Khmr" typeface="DaunPenh"/>
+        <a:font script="Knda" typeface="Tunga"/>
+        <a:font script="Guru" typeface="Raavi"/>
+        <a:font script="Cans" typeface="Euphemia"/>
+        <a:font script="Cher" typeface="Plantagenet Cherokee"/>
+        <a:font script="Yiii" typeface="Microsoft Yi Baiti"/>
+        <a:font script="Tibt" typeface="Microsoft Himalaya"/>
+        <a:font script="Thaa" typeface="MV Boli"/>
+        <a:font script="Deva" typeface="Mangal"/>
+        <a:font script="Telu" typeface="Gautami"/>
+        <a:font script="Taml" typeface="Latha"/>
+        <a:font script="Syrc" typeface="Estrangelo Edessa"/>
+        <a:font script="Orya" typeface="Kalinga"/>
+        <a:font script="Mlym" typeface="Kartika"/>
+        <a:font script="Laoo" typeface="DokChampa"/>
+        <a:font script="Sinh" typeface="Iskoola Pota"/>
+        <a:font script="Mong" typeface="Mongolian Baiti"/>
+        <a:font script="Viet" typeface="Arial"/>
+        <a:font script="Uigh" typeface="Microsoft Uighur"/>
+        <a:font script="Geor" typeface="Sylfaen"/>
+      </a:minorFont>
+    </a:fontScheme>
+    <a:fmtScheme name="Office">
+      <a:fillStyleLst>
+        <a:solidFill>
+          <a:schemeClr val="phClr"/>
+        </a:solidFill>
+        <a:gradFill rotWithShape="1">
+          <a:gsLst>
+            <a:gs pos="0">
+              <a:schemeClr val="phClr">
+                <a:tint val="50000"/>
+                <a:satMod val="300000"/>
+              </a:schemeClr>
+            </a:gs>
+            <a:gs pos="35000">
+              <a:schemeClr val="phClr">
+                <a:tint val="37000"/>
+                <a:satMod val="300000"/>
+              </a:schemeClr>
+            </a:gs>
+            <a:gs pos="100000">
+              <a:schemeClr val="phClr">
+                <a:tint val="15000"/>
+                <a:satMod val="350000"/>
+              </a:schemeClr>
+            </a:gs>
+          </a:gsLst>
+          <a:lin ang="16200000" scaled="1"/>
+        </a:gradFill>
+        <a:gradFill rotWithShape="1">
+          <a:gsLst>
+            <a:gs pos="0">
+              <a:schemeClr val="phClr">
+                <a:tint val="100000"/>
+                <a:shade val="100000"/>
+                <a:satMod val="130000"/>
+              </a:schemeClr>
+            </a:gs>
+            <a:gs pos="100000">
+              <a:schemeClr val="phClr">
+                <a:tint val="50000"/>
+                <a:shade val="100000"/>
+                <a:satMod val="350000"/>
+              </a:schemeClr>
+            </a:gs>
+          </a:gsLst>
+          <a:lin ang="16200000" scaled="0"/>
+        </a:gradFill>
+      </a:fillStyleLst>
+      <a:lnStyleLst>
+        <a:ln w="9525" cap="flat" cmpd="sng" algn="ctr">
+          <a:solidFill>
+            <a:schemeClr val="phClr">
+              <a:shade val="95000"/>
+              <a:satMod val="105000"/>
+            </a:schemeClr>
+          </a:solidFill>
+          <a:prstDash val="solid"/>
+        </a:ln>
+        <a:ln w="25400" cap="flat" cmpd="sng" algn="ctr">
+          <a:solidFill>
+            <a:schemeClr val="phClr"/>
+          </a:solidFill>
+          <a:prstDash val="solid"/>
+        </a:ln>
+        <a:ln w="38100" cap="flat" cmpd="sng" algn="ctr">
+          <a:solidFill>
+            <a:schemeClr val="phClr"/>
+          </a:solidFill>
+          <a:prstDash val="solid"/>
+        </a:ln>
+      </a:lnStyleLst>
+      <a:effectStyleLst>
+        <a:effectStyle>
+          <a:effectLst>
+            <a:outerShdw blurRad="40000" dist="20000" dir="5400000" rotWithShape="0">
+              <a:srgbClr val="000000">
+                <a:alpha val="38000"/>
+              </a:srgbClr>
+            </a:outerShdw>
+          </a:effectLst>
+        </a:effectStyle>
+        <a:effectStyle>
+          <a:effectLst>
+            <a:outerShdw blurRad="40000" dist="23000" dir="5400000" rotWithShape="0">
+              <a:srgbClr val="000000">
+                <a:alpha val="35000"/>
+              </a:srgbClr>
+            </a:outerShdw>
+          </a:effectLst>
+        </a:effectStyle>
+        <a:effectStyle>
+          <a:effectLst>
+            <a:outerShdw blurRad="40000" dist="23000" dir="5400000" rotWithShape="0">
+              <a:srgbClr val="000000">
+                <a:alpha val="35000"/>
+              </a:srgbClr>
+            </a:outerShdw>
+          </a:effectLst>
+          <a:scene3d>
+            <a:camera prst="orthographicFront">
+              <a:rot lat="0" lon="0" rev="0"/>
+            </a:camera>
+            <a:lightRig rig="threePt" dir="t">
+              <a:rot lat="0" lon="0" rev="1200000"/>
+            </a:lightRig>
+          </a:scene3d>
+          <a:sp3d>
+            <a:bevelT w="63500" h="25400"/>
+          </a:sp3d>
+        </a:effectStyle>
+      </a:effectStyleLst>
+      <a:bgFillStyleLst>
+        <a:solidFill>
+          <a:schemeClr val="phClr"/>
+        </a:solidFill>
+        <a:gradFill rotWithShape="1">
+          <a:gsLst>
+            <a:gs pos="0">
+              <a:schemeClr val="phClr">
+                <a:tint val="40000"/>
+                <a:satMod val="350000"/>
+              </a:schemeClr>
+            </a:gs>
+            <a:gs pos="40000">
+              <a:schemeClr val="phClr">
+                <a:tint val="45000"/>
+                <a:shade val="99000"/>
+                <a:satMod val="350000"/>
+              </a:schemeClr>
+            </a:gs>
+            <a:gs pos="100000">
+              <a:schemeClr val="phClr">
+                <a:shade val="20000"/>
+                <a:satMod val="255000"/>
+              </a:schemeClr>
+            </a:gs>
+          </a:gsLst>
+          <a:path path="circle">
+            <a:fillToRect l="50000" t="-80000" r="50000" b="180000"/>
+          </a:path>
+        </a:gradFill>
+        <a:gradFill rotWithShape="1">
+          <a:gsLst>
+            <a:gs pos="0">
+              <a:schemeClr val="phClr">
+                <a:tint val="80000"/>
+                <a:satMod val="300000"/>
+              </a:schemeClr>
+            </a:gs>
+            <a:gs pos="100000">
+              <a:schemeClr val="phClr">
+                <a:shade val="30000"/>
+                <a:satMod val="200000"/>
+              </a:schemeClr>
+            </a:gs>
+          </a:gsLst>
+          <a:path path="circle">
+            <a:fillToRect l="50000" t="50000" r="50000" b="50000"/>
+          </a:path>
+        </a:gradFill>
+      </a:bgFillStyleLst>
+    </a:fmtScheme>
+  </a:themeElements>
+  <a:objectDefaults>
+    <a:spDef>
+      <a:spPr/>
+      <a:bodyPr/>
+      <a:lstStyle/>
+      <a:style>
+        <a:lnRef idx="1">
+          <a:schemeClr val="accent1"/>
+        </a:lnRef>
+        <a:fillRef idx="3">
+          <a:schemeClr val="accent1"/>
+        </a:fillRef>
+        <a:effectRef idx="2">
+          <a:schemeClr val="accent1"/>
+        </a:effectRef>
+        <a:fontRef idx="minor">
+          <a:schemeClr val="lt1"/>
+        </a:fontRef>
+      </a:style>
+    </a:spDef>
+    <a:lnDef>
+      <a:spPr/>
+      <a:bodyPr/>
+      <a:lstStyle/>
+      <a:style>
+        <a:lnRef idx="2">
+          <a:schemeClr val="accent1"/>
+        </a:lnRef>
+        <a:fillRef idx="0">
+          <a:schemeClr val="accent1"/>
+        </a:fillRef>
+        <a:effectRef idx="1">
+          <a:schemeClr val="accent1"/>
+        </a:effectRef>
+        <a:fontRef idx="minor">
+          <a:schemeClr val="tx1"/>
+        </a:fontRef>
+      </a:style>
+    </a:lnDef>
+  </a:objectDefaults>
+  <a:extraClrSchemeLst/>
+</a:theme>
 </file>